--- a/courses/论语/论语_第3天.pptx
+++ b/courses/论语/论语_第3天.pptx
@@ -7,18 +7,6 @@
   <p:sldIdLst>
     <p:sldId id="256" r:id="rId7"/>
     <p:sldId id="257" r:id="rId8"/>
-    <p:sldId id="258" r:id="rId9"/>
-    <p:sldId id="259" r:id="rId10"/>
-    <p:sldId id="260" r:id="rId11"/>
-    <p:sldId id="261" r:id="rId12"/>
-    <p:sldId id="262" r:id="rId13"/>
-    <p:sldId id="263" r:id="rId14"/>
-    <p:sldId id="264" r:id="rId15"/>
-    <p:sldId id="265" r:id="rId16"/>
-    <p:sldId id="266" r:id="rId17"/>
-    <p:sldId id="267" r:id="rId18"/>
-    <p:sldId id="268" r:id="rId19"/>
-    <p:sldId id="269" r:id="rId20"/>
   </p:sldIdLst>
   <p:sldSz cx="9144000" cy="6858000" type="screen4x3"/>
   <p:notesSz cx="6858000" cy="9144000"/>
@@ -3174,7 +3162,7 @@
               </a:defRPr>
             </a:pPr>
             <a:r>
-              <a:t>Guo Xue Jing Dian Jing Du - Day 3</a:t>
+              <a:t>国学经典精读 · 第3天</a:t>
             </a:r>
           </a:p>
         </p:txBody>
@@ -3187,7 +3175,7 @@
         </p:nvSpPr>
         <p:spPr>
           <a:xfrm>
-            <a:off x="914400" y="2286000"/>
+            <a:off x="914400" y="2560320"/>
             <a:ext cx="7315200" cy="1371600"/>
           </a:xfrm>
           <a:prstGeom prst="rect">
@@ -3202,14 +3190,14 @@
           <a:lstStyle/>
           <a:p>
             <a:pPr algn="ctr">
-              <a:defRPr sz="6000" b="1">
+              <a:defRPr sz="5200" b="1">
                 <a:solidFill>
                   <a:srgbClr val="1E3C72"/>
                 </a:solidFill>
               </a:defRPr>
             </a:pPr>
             <a:r>
-              <a:t>八佾第三 Ba Yi Di San</a:t>
+              <a:t>论语 · 八佾第三</a:t>
             </a:r>
           </a:p>
         </p:txBody>
@@ -3217,90 +3205,6 @@
       <p:sp>
         <p:nvSpPr>
           <p:cNvPr id="5" name="TextBox 4"/>
-          <p:cNvSpPr txBox="1"/>
-          <p:nvPr/>
-        </p:nvSpPr>
-        <p:spPr>
-          <a:xfrm>
-            <a:off x="914400" y="3931920"/>
-            <a:ext cx="7315200" cy="914400"/>
-          </a:xfrm>
-          <a:prstGeom prst="rect">
-            <a:avLst/>
-          </a:prstGeom>
-          <a:noFill/>
-        </p:spPr>
-        <p:txBody>
-          <a:bodyPr wrap="none">
-            <a:spAutoFit/>
-          </a:bodyPr>
-          <a:lstStyle/>
-          <a:p>
-            <a:pPr algn="ctr">
-              <a:defRPr sz="2800">
-                <a:solidFill>
-                  <a:srgbClr val="666666"/>
-                </a:solidFill>
-              </a:defRPr>
-            </a:pPr>
-            <a:r>
-              <a:t>Shi Ke Ren Shu Bu Ke Ren (是可忍孰不可忍), Yu Qi She Ye Ning Jian (与其奢也宁俭), Gao Shuo Xi Yang (告朔饩羊)</a:t>
-            </a:r>
-          </a:p>
-        </p:txBody>
-      </p:sp>
-      <p:sp>
-        <p:nvSpPr>
-          <p:cNvPr id="6" name="Rounded Rectangle 5"/>
-          <p:cNvSpPr/>
-          <p:nvPr/>
-        </p:nvSpPr>
-        <p:spPr>
-          <a:xfrm>
-            <a:off x="1371600" y="5029200"/>
-            <a:ext cx="6400800" cy="1188720"/>
-          </a:xfrm>
-          <a:prstGeom prst="roundRect">
-            <a:avLst/>
-          </a:prstGeom>
-          <a:solidFill>
-            <a:srgbClr val="F5F5F0"/>
-          </a:solidFill>
-        </p:spPr>
-        <p:style>
-          <a:lnRef idx="1">
-            <a:schemeClr val="accent1"/>
-          </a:lnRef>
-          <a:fillRef idx="3">
-            <a:schemeClr val="accent1"/>
-          </a:fillRef>
-          <a:effectRef idx="2">
-            <a:schemeClr val="accent1"/>
-          </a:effectRef>
-          <a:fontRef idx="minor">
-            <a:schemeClr val="lt1"/>
-          </a:fontRef>
-        </p:style>
-        <p:txBody>
-          <a:bodyPr rtlCol="0" anchor="ctr" wrap="square"/>
-          <a:lstStyle/>
-          <a:p>
-            <a:pPr algn="ctr">
-              <a:defRPr sz="2400" i="1">
-                <a:solidFill>
-                  <a:srgbClr val="1E3C72"/>
-                </a:solidFill>
-              </a:defRPr>
-            </a:pPr>
-            <a:r>
-              <a:t>Kongzi Wei Ji Shi:</a:t>
-            </a:r>
-          </a:p>
-        </p:txBody>
-      </p:sp>
-      <p:sp>
-        <p:nvSpPr>
-          <p:cNvPr id="7" name="TextBox 6"/>
           <p:cNvSpPr txBox="1"/>
           <p:nvPr/>
         </p:nvSpPr>
@@ -3341,7 +3245,7 @@
 </p:sld>
 </file>
 
-<file path=ppt/slides/slide10.xml><?xml version="1.0" encoding="utf-8"?>
+<file path=ppt/slides/slide2.xml><?xml version="1.0" encoding="utf-8"?>
 <p:sld xmlns:a="http://schemas.openxmlformats.org/drawingml/2006/main" xmlns:p="http://schemas.openxmlformats.org/presentationml/2006/main" xmlns:r="http://schemas.openxmlformats.org/officeDocument/2006/relationships">
   <p:cSld>
     <p:spTree>
@@ -3424,7 +3328,7 @@
               </a:defRPr>
             </a:pPr>
             <a:r>
-              <a:t>Chapter 9 - Core Ideas</a:t>
+              <a:t>第3章 · 礼之用</a:t>
             </a:r>
           </a:p>
         </p:txBody>
@@ -3438,7 +3342,80 @@
         <p:spPr>
           <a:xfrm>
             <a:off x="457200" y="1371600"/>
-            <a:ext cx="8229600" cy="1371600"/>
+            <a:ext cx="8229600" cy="1645920"/>
+          </a:xfrm>
+          <a:prstGeom prst="roundRect">
+            <a:avLst/>
+          </a:prstGeom>
+          <a:solidFill>
+            <a:srgbClr val="F5F5F0"/>
+          </a:solidFill>
+        </p:spPr>
+        <p:style>
+          <a:lnRef idx="1">
+            <a:schemeClr val="accent1"/>
+          </a:lnRef>
+          <a:fillRef idx="3">
+            <a:schemeClr val="accent1"/>
+          </a:fillRef>
+          <a:effectRef idx="2">
+            <a:schemeClr val="accent1"/>
+          </a:effectRef>
+          <a:fontRef idx="minor">
+            <a:schemeClr val="lt1"/>
+          </a:fontRef>
+        </p:style>
+        <p:txBody>
+          <a:bodyPr rtlCol="0" anchor="ctr" wrap="square"/>
+          <a:lstStyle/>
+          <a:p>
+            <a:pPr algn="ctr">
+              <a:defRPr sz="1600" b="1">
+                <a:solidFill>
+                  <a:srgbClr val="1E3C72"/>
+                </a:solidFill>
+              </a:defRPr>
+            </a:pPr>
+            <a:r>
+              <a:t>[原文]</a:t>
+            </a:r>
+          </a:p>
+          <a:p>
+            <a:pPr>
+              <a:defRPr sz="2400">
+                <a:solidFill>
+                  <a:srgbClr val="333333"/>
+                </a:solidFill>
+              </a:defRPr>
+            </a:pPr>
+            <a:r>
+              <a:t>礼之用，和为贵。</a:t>
+            </a:r>
+          </a:p>
+          <a:p>
+            <a:pPr>
+              <a:defRPr sz="2400">
+                <a:solidFill>
+                  <a:srgbClr val="333333"/>
+                </a:solidFill>
+              </a:defRPr>
+            </a:pPr>
+            <a:r>
+              <a:t>先王之道，斯为美，小大由之。</a:t>
+            </a:r>
+          </a:p>
+        </p:txBody>
+      </p:sp>
+      <p:sp>
+        <p:nvSpPr>
+          <p:cNvPr id="5" name="Rounded Rectangle 4"/>
+          <p:cNvSpPr/>
+          <p:nvPr/>
+        </p:nvSpPr>
+        <p:spPr>
+          <a:xfrm>
+            <a:off x="457200" y="3200400"/>
+            <a:ext cx="8229600" cy="1188720"/>
           </a:xfrm>
           <a:prstGeom prst="roundRect">
             <a:avLst/>
@@ -3466,40 +3443,40 @@
           <a:lstStyle/>
           <a:p>
             <a:pPr algn="ctr">
-              <a:defRPr sz="2000" b="1">
+              <a:defRPr sz="1400" b="1">
+                <a:solidFill>
+                  <a:srgbClr val="C8DCFF"/>
+                </a:solidFill>
+              </a:defRPr>
+            </a:pPr>
+            <a:r>
+              <a:t>[Translation]</a:t>
+            </a:r>
+          </a:p>
+          <a:p>
+            <a:pPr>
+              <a:defRPr sz="1600">
                 <a:solidFill>
                   <a:srgbClr val="FFFFFF"/>
                 </a:solidFill>
               </a:defRPr>
             </a:pPr>
             <a:r>
-              <a:t>Core Concept</a:t>
-            </a:r>
-          </a:p>
-          <a:p>
-            <a:pPr>
-              <a:defRPr sz="1700">
-                <a:solidFill>
-                  <a:srgbClr val="E6E6E6"/>
-                </a:solidFill>
-              </a:defRPr>
-            </a:pPr>
-            <a:r>
-              <a:t>尔爱其羊，我爱其礼: Form is not content, but it carries content. When we abolish a certai...</a:t>
-            </a:r>
-          </a:p>
-        </p:txBody>
-      </p:sp>
-      <p:sp>
-        <p:nvSpPr>
-          <p:cNvPr id="5" name="TextBox 4"/>
+              <a:t>In the practice of ritual, harmony is most valuable. The ways of the ancient kings were excellent - both great and small matters followed this principle.</a:t>
+            </a:r>
+          </a:p>
+        </p:txBody>
+      </p:sp>
+      <p:sp>
+        <p:nvSpPr>
+          <p:cNvPr id="6" name="TextBox 5"/>
           <p:cNvSpPr txBox="1"/>
           <p:nvPr/>
         </p:nvSpPr>
         <p:spPr>
           <a:xfrm>
-            <a:off x="457200" y="2926080"/>
-            <a:ext cx="8229600" cy="1097280"/>
+            <a:off x="457200" y="4572000"/>
+            <a:ext cx="8229600" cy="365760"/>
           </a:xfrm>
           <a:prstGeom prst="rect">
             <a:avLst/>
@@ -3507,46 +3484,46 @@
           <a:noFill/>
         </p:spPr>
         <p:txBody>
-          <a:bodyPr wrap="square">
+          <a:bodyPr wrap="none">
             <a:spAutoFit/>
           </a:bodyPr>
           <a:lstStyle/>
           <a:p>
             <a:pPr>
-              <a:defRPr sz="1900" b="1">
+              <a:defRPr sz="1600" b="1">
                 <a:solidFill>
                   <a:srgbClr val="1E3C72"/>
                 </a:solidFill>
               </a:defRPr>
             </a:pPr>
             <a:r>
-              <a:t>1. 形式与内容</a:t>
+              <a:t>1. Harmony in Ritual</a:t>
             </a:r>
           </a:p>
           <a:p>
             <a:pPr>
-              <a:defRPr sz="1600">
+              <a:defRPr sz="1400">
                 <a:solidFill>
                   <a:srgbClr val="333333"/>
                 </a:solidFill>
               </a:defRPr>
             </a:pPr>
             <a:r>
-              <a:t>羊只是形式，但形式承载着内容——去掉形式，内容也难以为继。</a:t>
-            </a:r>
-          </a:p>
-        </p:txBody>
-      </p:sp>
-      <p:sp>
-        <p:nvSpPr>
-          <p:cNvPr id="6" name="TextBox 5"/>
+              <a:t>礼之用，和为贵：礼仪的最高境界是和谐</a:t>
+            </a:r>
+          </a:p>
+        </p:txBody>
+      </p:sp>
+      <p:sp>
+        <p:nvSpPr>
+          <p:cNvPr id="7" name="TextBox 6"/>
           <p:cNvSpPr txBox="1"/>
           <p:nvPr/>
         </p:nvSpPr>
         <p:spPr>
           <a:xfrm>
-            <a:off x="457200" y="4023360"/>
-            <a:ext cx="8229600" cy="1097280"/>
+            <a:off x="457200" y="5349240"/>
+            <a:ext cx="8229600" cy="365760"/>
           </a:xfrm>
           <a:prstGeom prst="rect">
             <a:avLst/>
@@ -3554,46 +3531,46 @@
           <a:noFill/>
         </p:spPr>
         <p:txBody>
-          <a:bodyPr wrap="square">
+          <a:bodyPr wrap="none">
             <a:spAutoFit/>
           </a:bodyPr>
           <a:lstStyle/>
           <a:p>
             <a:pPr>
-              <a:defRPr sz="1900" b="1">
+              <a:defRPr sz="1600" b="1">
                 <a:solidFill>
                   <a:srgbClr val="1E3C72"/>
                 </a:solidFill>
               </a:defRPr>
             </a:pPr>
             <a:r>
-              <a:t>2. 我爱其礼</a:t>
+              <a:t>2. Ancient Wisdom</a:t>
             </a:r>
           </a:p>
           <a:p>
             <a:pPr>
-              <a:defRPr sz="1600">
+              <a:defRPr sz="1400">
                 <a:solidFill>
                   <a:srgbClr val="333333"/>
                 </a:solidFill>
               </a:defRPr>
             </a:pPr>
             <a:r>
-              <a:t>孔子重视的不是羊，而是礼所代表的精神——礼的形式是精神的载体。</a:t>
-            </a:r>
-          </a:p>
-        </p:txBody>
-      </p:sp>
-      <p:sp>
-        <p:nvSpPr>
-          <p:cNvPr id="7" name="TextBox 6"/>
+              <a:t>先王之道：古代圣王的治国之道</a:t>
+            </a:r>
+          </a:p>
+        </p:txBody>
+      </p:sp>
+      <p:sp>
+        <p:nvSpPr>
+          <p:cNvPr id="8" name="TextBox 7"/>
           <p:cNvSpPr txBox="1"/>
           <p:nvPr/>
         </p:nvSpPr>
         <p:spPr>
           <a:xfrm>
-            <a:off x="457200" y="5120640"/>
-            <a:ext cx="8229600" cy="1097280"/>
+            <a:off x="457200" y="6126479"/>
+            <a:ext cx="8229600" cy="365760"/>
           </a:xfrm>
           <a:prstGeom prst="rect">
             <a:avLst/>
@@ -3601,39 +3578,39 @@
           <a:noFill/>
         </p:spPr>
         <p:txBody>
-          <a:bodyPr wrap="square">
+          <a:bodyPr wrap="none">
             <a:spAutoFit/>
           </a:bodyPr>
           <a:lstStyle/>
           <a:p>
             <a:pPr>
-              <a:defRPr sz="1900" b="1">
+              <a:defRPr sz="1600" b="1">
                 <a:solidFill>
                   <a:srgbClr val="1E3C72"/>
                 </a:solidFill>
               </a:defRPr>
             </a:pPr>
             <a:r>
-              <a:t>3. 保存仪节</a:t>
+              <a:t>3. Proportional Application</a:t>
             </a:r>
           </a:p>
           <a:p>
             <a:pPr>
-              <a:defRPr sz="1600">
+              <a:defRPr sz="1400">
                 <a:solidFill>
                   <a:srgbClr val="333333"/>
                 </a:solidFill>
               </a:defRPr>
             </a:pPr>
             <a:r>
-              <a:t>有些形式即使看起来无用，但它是维持精神的一种方式——仪节不可轻易废去。</a:t>
-            </a:r>
-          </a:p>
-        </p:txBody>
-      </p:sp>
-      <p:sp>
-        <p:nvSpPr>
-          <p:cNvPr id="8" name="TextBox 7"/>
+              <a:t>小大由之：无论大事小事都依此原则</a:t>
+            </a:r>
+          </a:p>
+        </p:txBody>
+      </p:sp>
+      <p:sp>
+        <p:nvSpPr>
+          <p:cNvPr id="9" name="TextBox 8"/>
           <p:cNvSpPr txBox="1"/>
           <p:nvPr/>
         </p:nvSpPr>
@@ -3661,3468 +3638,7 @@
               </a:defRPr>
             </a:pPr>
             <a:r>
-              <a:t>10/14</a:t>
-            </a:r>
-          </a:p>
-        </p:txBody>
-      </p:sp>
-    </p:spTree>
-  </p:cSld>
-  <p:clrMapOvr>
-    <a:masterClrMapping/>
-  </p:clrMapOvr>
-</p:sld>
-</file>
-
-<file path=ppt/slides/slide11.xml><?xml version="1.0" encoding="utf-8"?>
-<p:sld xmlns:a="http://schemas.openxmlformats.org/drawingml/2006/main" xmlns:p="http://schemas.openxmlformats.org/presentationml/2006/main" xmlns:r="http://schemas.openxmlformats.org/officeDocument/2006/relationships">
-  <p:cSld>
-    <p:spTree>
-      <p:nvGrpSpPr>
-        <p:cNvPr id="1" name=""/>
-        <p:cNvGrpSpPr/>
-        <p:nvPr/>
-      </p:nvGrpSpPr>
-      <p:grpSpPr/>
-      <p:sp>
-        <p:nvSpPr>
-          <p:cNvPr id="2" name="Rectangle 1"/>
-          <p:cNvSpPr/>
-          <p:nvPr/>
-        </p:nvSpPr>
-        <p:spPr>
-          <a:xfrm>
-            <a:off x="0" y="0"/>
-            <a:ext cx="9144000" cy="1188720"/>
-          </a:xfrm>
-          <a:prstGeom prst="rect">
-            <a:avLst/>
-          </a:prstGeom>
-          <a:solidFill>
-            <a:srgbClr val="1E3C72"/>
-          </a:solidFill>
-          <a:ln>
-            <a:noFill/>
-          </a:ln>
-        </p:spPr>
-        <p:style>
-          <a:lnRef idx="1">
-            <a:schemeClr val="accent1"/>
-          </a:lnRef>
-          <a:fillRef idx="3">
-            <a:schemeClr val="accent1"/>
-          </a:fillRef>
-          <a:effectRef idx="2">
-            <a:schemeClr val="accent1"/>
-          </a:effectRef>
-          <a:fontRef idx="minor">
-            <a:schemeClr val="lt1"/>
-          </a:fontRef>
-        </p:style>
-        <p:txBody>
-          <a:bodyPr rtlCol="0" anchor="ctr"/>
-          <a:lstStyle/>
-          <a:p>
-            <a:pPr algn="ctr"/>
-          </a:p>
-        </p:txBody>
-      </p:sp>
-      <p:sp>
-        <p:nvSpPr>
-          <p:cNvPr id="3" name="TextBox 2"/>
-          <p:cNvSpPr txBox="1"/>
-          <p:nvPr/>
-        </p:nvSpPr>
-        <p:spPr>
-          <a:xfrm>
-            <a:off x="457200" y="228600"/>
-            <a:ext cx="8229600" cy="731520"/>
-          </a:xfrm>
-          <a:prstGeom prst="rect">
-            <a:avLst/>
-          </a:prstGeom>
-          <a:noFill/>
-        </p:spPr>
-        <p:txBody>
-          <a:bodyPr wrap="none">
-            <a:spAutoFit/>
-          </a:bodyPr>
-          <a:lstStyle/>
-          <a:p>
-            <a:pPr>
-              <a:defRPr sz="3400" b="1">
-                <a:solidFill>
-                  <a:srgbClr val="FFFFFF"/>
-                </a:solidFill>
-              </a:defRPr>
-            </a:pPr>
-            <a:r>
-              <a:t>Western Thought Comparison</a:t>
-            </a:r>
-          </a:p>
-        </p:txBody>
-      </p:sp>
-      <p:sp>
-        <p:nvSpPr>
-          <p:cNvPr id="4" name="Rounded Rectangle 3"/>
-          <p:cNvSpPr/>
-          <p:nvPr/>
-        </p:nvSpPr>
-        <p:spPr>
-          <a:xfrm>
-            <a:off x="457200" y="1371600"/>
-            <a:ext cx="8229600" cy="1097280"/>
-          </a:xfrm>
-          <a:prstGeom prst="roundRect">
-            <a:avLst/>
-          </a:prstGeom>
-          <a:solidFill>
-            <a:srgbClr val="F5F5F0"/>
-          </a:solidFill>
-        </p:spPr>
-        <p:style>
-          <a:lnRef idx="1">
-            <a:schemeClr val="accent1"/>
-          </a:lnRef>
-          <a:fillRef idx="3">
-            <a:schemeClr val="accent1"/>
-          </a:fillRef>
-          <a:effectRef idx="2">
-            <a:schemeClr val="accent1"/>
-          </a:effectRef>
-          <a:fontRef idx="minor">
-            <a:schemeClr val="lt1"/>
-          </a:fontRef>
-        </p:style>
-        <p:txBody>
-          <a:bodyPr rtlCol="0" anchor="ctr" wrap="square"/>
-          <a:lstStyle/>
-          <a:p>
-            <a:pPr algn="ctr">
-              <a:defRPr sz="1700" b="1">
-                <a:solidFill>
-                  <a:srgbClr val="1E3C72"/>
-                </a:solidFill>
-              </a:defRPr>
-            </a:pPr>
-            <a:r>
-              <a:t>Plato: The Ideal State</a:t>
-            </a:r>
-          </a:p>
-          <a:p>
-            <a:pPr>
-              <a:defRPr sz="1500">
-                <a:solidFill>
-                  <a:srgbClr val="333333"/>
-                </a:solidFill>
-              </a:defRPr>
-            </a:pPr>
-            <a:r>
-              <a:t>Each class performs its own function for social harmony - usurping classes disrupts the entire social order. c. 380 BCE</a:t>
-            </a:r>
-          </a:p>
-        </p:txBody>
-      </p:sp>
-      <p:sp>
-        <p:nvSpPr>
-          <p:cNvPr id="5" name="Rounded Rectangle 4"/>
-          <p:cNvSpPr/>
-          <p:nvPr/>
-        </p:nvSpPr>
-        <p:spPr>
-          <a:xfrm>
-            <a:off x="457200" y="2560320"/>
-            <a:ext cx="8229600" cy="1097280"/>
-          </a:xfrm>
-          <a:prstGeom prst="roundRect">
-            <a:avLst/>
-          </a:prstGeom>
-          <a:solidFill>
-            <a:srgbClr val="F5F5F0"/>
-          </a:solidFill>
-        </p:spPr>
-        <p:style>
-          <a:lnRef idx="1">
-            <a:schemeClr val="accent1"/>
-          </a:lnRef>
-          <a:fillRef idx="3">
-            <a:schemeClr val="accent1"/>
-          </a:fillRef>
-          <a:effectRef idx="2">
-            <a:schemeClr val="accent1"/>
-          </a:effectRef>
-          <a:fontRef idx="minor">
-            <a:schemeClr val="lt1"/>
-          </a:fontRef>
-        </p:style>
-        <p:txBody>
-          <a:bodyPr rtlCol="0" anchor="ctr" wrap="square"/>
-          <a:lstStyle/>
-          <a:p>
-            <a:pPr algn="ctr">
-              <a:defRPr sz="1700" b="1">
-                <a:solidFill>
-                  <a:srgbClr val="1E3C72"/>
-                </a:solidFill>
-              </a:defRPr>
-            </a:pPr>
-            <a:r>
-              <a:t>Durkheim: Social Division of Labor</a:t>
-            </a:r>
-          </a:p>
-          <a:p>
-            <a:pPr>
-              <a:defRPr sz="1500">
-                <a:solidFill>
-                  <a:srgbClr val="333333"/>
-                </a:solidFill>
-              </a:defRPr>
-            </a:pPr>
-            <a:r>
-              <a:t>Social organic solidarity is based on everyone fulfilling their social roles - role confusion leads to social disorder. 1893</a:t>
-            </a:r>
-          </a:p>
-        </p:txBody>
-      </p:sp>
-      <p:sp>
-        <p:nvSpPr>
-          <p:cNvPr id="6" name="Rounded Rectangle 5"/>
-          <p:cNvSpPr/>
-          <p:nvPr/>
-        </p:nvSpPr>
-        <p:spPr>
-          <a:xfrm>
-            <a:off x="457200" y="3749039"/>
-            <a:ext cx="8229600" cy="1097280"/>
-          </a:xfrm>
-          <a:prstGeom prst="roundRect">
-            <a:avLst/>
-          </a:prstGeom>
-          <a:solidFill>
-            <a:srgbClr val="F5F5F0"/>
-          </a:solidFill>
-        </p:spPr>
-        <p:style>
-          <a:lnRef idx="1">
-            <a:schemeClr val="accent1"/>
-          </a:lnRef>
-          <a:fillRef idx="3">
-            <a:schemeClr val="accent1"/>
-          </a:fillRef>
-          <a:effectRef idx="2">
-            <a:schemeClr val="accent1"/>
-          </a:effectRef>
-          <a:fontRef idx="minor">
-            <a:schemeClr val="lt1"/>
-          </a:fontRef>
-        </p:style>
-        <p:txBody>
-          <a:bodyPr rtlCol="0" anchor="ctr" wrap="square"/>
-          <a:lstStyle/>
-          <a:p>
-            <a:pPr algn="ctr">
-              <a:defRPr sz="1700" b="1">
-                <a:solidFill>
-                  <a:srgbClr val="1E3C72"/>
-                </a:solidFill>
-              </a:defRPr>
-            </a:pPr>
-            <a:r>
-              <a:t>Montesquieu: Spirit of Laws</a:t>
-            </a:r>
-          </a:p>
-          <a:p>
-            <a:pPr>
-              <a:defRPr sz="1500">
-                <a:solidFill>
-                  <a:srgbClr val="333333"/>
-                </a:solidFill>
-              </a:defRPr>
-            </a:pPr>
-            <a:r>
-              <a:t>Law reflects a society's basic order - breaking the law is breaking the social contract. 1748</a:t>
-            </a:r>
-          </a:p>
-        </p:txBody>
-      </p:sp>
-      <p:sp>
-        <p:nvSpPr>
-          <p:cNvPr id="7" name="Rounded Rectangle 6"/>
-          <p:cNvSpPr/>
-          <p:nvPr/>
-        </p:nvSpPr>
-        <p:spPr>
-          <a:xfrm>
-            <a:off x="457200" y="4937759"/>
-            <a:ext cx="8229600" cy="1097280"/>
-          </a:xfrm>
-          <a:prstGeom prst="roundRect">
-            <a:avLst/>
-          </a:prstGeom>
-          <a:solidFill>
-            <a:srgbClr val="F5F5F0"/>
-          </a:solidFill>
-        </p:spPr>
-        <p:style>
-          <a:lnRef idx="1">
-            <a:schemeClr val="accent1"/>
-          </a:lnRef>
-          <a:fillRef idx="3">
-            <a:schemeClr val="accent1"/>
-          </a:fillRef>
-          <a:effectRef idx="2">
-            <a:schemeClr val="accent1"/>
-          </a:effectRef>
-          <a:fontRef idx="minor">
-            <a:schemeClr val="lt1"/>
-          </a:fontRef>
-        </p:style>
-        <p:txBody>
-          <a:bodyPr rtlCol="0" anchor="ctr" wrap="square"/>
-          <a:lstStyle/>
-          <a:p>
-            <a:pPr algn="ctr">
-              <a:defRPr sz="1700" b="1">
-                <a:solidFill>
-                  <a:srgbClr val="1E3C72"/>
-                </a:solidFill>
-              </a:defRPr>
-            </a:pPr>
-            <a:r>
-              <a:t>Rawls: Theory of Justice</a:t>
-            </a:r>
-          </a:p>
-          <a:p>
-            <a:pPr>
-              <a:defRPr sz="1500">
-                <a:solidFill>
-                  <a:srgbClr val="333333"/>
-                </a:solidFill>
-              </a:defRPr>
-            </a:pPr>
-            <a:r>
-              <a:t>Social rules should be acceptable even to the most disadvantaged - unfair rules will eventually collapse. 1971</a:t>
-            </a:r>
-          </a:p>
-        </p:txBody>
-      </p:sp>
-      <p:sp>
-        <p:nvSpPr>
-          <p:cNvPr id="8" name="TextBox 7"/>
-          <p:cNvSpPr txBox="1"/>
-          <p:nvPr/>
-        </p:nvSpPr>
-        <p:spPr>
-          <a:xfrm>
-            <a:off x="8229600" y="6583680"/>
-            <a:ext cx="731520" cy="274320"/>
-          </a:xfrm>
-          <a:prstGeom prst="rect">
-            <a:avLst/>
-          </a:prstGeom>
-          <a:noFill/>
-        </p:spPr>
-        <p:txBody>
-          <a:bodyPr wrap="none">
-            <a:spAutoFit/>
-          </a:bodyPr>
-          <a:lstStyle/>
-          <a:p>
-            <a:pPr algn="r">
-              <a:defRPr sz="1200">
-                <a:solidFill>
-                  <a:srgbClr val="969696"/>
-                </a:solidFill>
-              </a:defRPr>
-            </a:pPr>
-            <a:r>
-              <a:t>11/14</a:t>
-            </a:r>
-          </a:p>
-        </p:txBody>
-      </p:sp>
-    </p:spTree>
-  </p:cSld>
-  <p:clrMapOvr>
-    <a:masterClrMapping/>
-  </p:clrMapOvr>
-</p:sld>
-</file>
-
-<file path=ppt/slides/slide12.xml><?xml version="1.0" encoding="utf-8"?>
-<p:sld xmlns:a="http://schemas.openxmlformats.org/drawingml/2006/main" xmlns:p="http://schemas.openxmlformats.org/presentationml/2006/main" xmlns:r="http://schemas.openxmlformats.org/officeDocument/2006/relationships">
-  <p:cSld>
-    <p:spTree>
-      <p:nvGrpSpPr>
-        <p:cNvPr id="1" name=""/>
-        <p:cNvGrpSpPr/>
-        <p:nvPr/>
-      </p:nvGrpSpPr>
-      <p:grpSpPr/>
-      <p:sp>
-        <p:nvSpPr>
-          <p:cNvPr id="2" name="Rectangle 1"/>
-          <p:cNvSpPr/>
-          <p:nvPr/>
-        </p:nvSpPr>
-        <p:spPr>
-          <a:xfrm>
-            <a:off x="0" y="0"/>
-            <a:ext cx="9144000" cy="1188720"/>
-          </a:xfrm>
-          <a:prstGeom prst="rect">
-            <a:avLst/>
-          </a:prstGeom>
-          <a:solidFill>
-            <a:srgbClr val="1E3C72"/>
-          </a:solidFill>
-          <a:ln>
-            <a:noFill/>
-          </a:ln>
-        </p:spPr>
-        <p:style>
-          <a:lnRef idx="1">
-            <a:schemeClr val="accent1"/>
-          </a:lnRef>
-          <a:fillRef idx="3">
-            <a:schemeClr val="accent1"/>
-          </a:fillRef>
-          <a:effectRef idx="2">
-            <a:schemeClr val="accent1"/>
-          </a:effectRef>
-          <a:fontRef idx="minor">
-            <a:schemeClr val="lt1"/>
-          </a:fontRef>
-        </p:style>
-        <p:txBody>
-          <a:bodyPr rtlCol="0" anchor="ctr"/>
-          <a:lstStyle/>
-          <a:p>
-            <a:pPr algn="ctr"/>
-          </a:p>
-        </p:txBody>
-      </p:sp>
-      <p:sp>
-        <p:nvSpPr>
-          <p:cNvPr id="3" name="TextBox 2"/>
-          <p:cNvSpPr txBox="1"/>
-          <p:nvPr/>
-        </p:nvSpPr>
-        <p:spPr>
-          <a:xfrm>
-            <a:off x="457200" y="228600"/>
-            <a:ext cx="8229600" cy="731520"/>
-          </a:xfrm>
-          <a:prstGeom prst="rect">
-            <a:avLst/>
-          </a:prstGeom>
-          <a:noFill/>
-        </p:spPr>
-        <p:txBody>
-          <a:bodyPr wrap="none">
-            <a:spAutoFit/>
-          </a:bodyPr>
-          <a:lstStyle/>
-          <a:p>
-            <a:pPr>
-              <a:defRPr sz="3400" b="1">
-                <a:solidFill>
-                  <a:srgbClr val="FFFFFF"/>
-                </a:solidFill>
-              </a:defRPr>
-            </a:pPr>
-            <a:r>
-              <a:t>Modern Application</a:t>
-            </a:r>
-          </a:p>
-        </p:txBody>
-      </p:sp>
-      <p:sp>
-        <p:nvSpPr>
-          <p:cNvPr id="4" name="Rounded Rectangle 3"/>
-          <p:cNvSpPr/>
-          <p:nvPr/>
-        </p:nvSpPr>
-        <p:spPr>
-          <a:xfrm>
-            <a:off x="457200" y="1371600"/>
-            <a:ext cx="8229600" cy="1188720"/>
-          </a:xfrm>
-          <a:prstGeom prst="roundRect">
-            <a:avLst/>
-          </a:prstGeom>
-          <a:solidFill>
-            <a:srgbClr val="F5F5F0"/>
-          </a:solidFill>
-        </p:spPr>
-        <p:style>
-          <a:lnRef idx="1">
-            <a:schemeClr val="accent1"/>
-          </a:lnRef>
-          <a:fillRef idx="3">
-            <a:schemeClr val="accent1"/>
-          </a:fillRef>
-          <a:effectRef idx="2">
-            <a:schemeClr val="accent1"/>
-          </a:effectRef>
-          <a:fontRef idx="minor">
-            <a:schemeClr val="lt1"/>
-          </a:fontRef>
-        </p:style>
-        <p:txBody>
-          <a:bodyPr rtlCol="0" anchor="ctr" wrap="square"/>
-          <a:lstStyle/>
-          <a:p>
-            <a:pPr algn="ctr">
-              <a:defRPr sz="1800" b="1">
-                <a:solidFill>
-                  <a:srgbClr val="1E3C72"/>
-                </a:solidFill>
-              </a:defRPr>
-            </a:pPr>
-            <a:r>
-              <a:t>1. 礼崩乐坏</a:t>
-            </a:r>
-          </a:p>
-          <a:p>
-            <a:pPr>
-              <a:defRPr sz="1500">
-                <a:solidFill>
-                  <a:srgbClr val="333333"/>
-                </a:solidFill>
-              </a:defRPr>
-            </a:pPr>
-            <a:r>
-              <a:t>季氏用天子规格的乐舞，是公然僭越礼制——春秋末期礼崩乐坏的缩影。</a:t>
-            </a:r>
-          </a:p>
-        </p:txBody>
-      </p:sp>
-      <p:sp>
-        <p:nvSpPr>
-          <p:cNvPr id="5" name="Rounded Rectangle 4"/>
-          <p:cNvSpPr/>
-          <p:nvPr/>
-        </p:nvSpPr>
-        <p:spPr>
-          <a:xfrm>
-            <a:off x="457200" y="2651760"/>
-            <a:ext cx="8229600" cy="1188720"/>
-          </a:xfrm>
-          <a:prstGeom prst="roundRect">
-            <a:avLst/>
-          </a:prstGeom>
-          <a:solidFill>
-            <a:srgbClr val="F5F5F0"/>
-          </a:solidFill>
-        </p:spPr>
-        <p:style>
-          <a:lnRef idx="1">
-            <a:schemeClr val="accent1"/>
-          </a:lnRef>
-          <a:fillRef idx="3">
-            <a:schemeClr val="accent1"/>
-          </a:fillRef>
-          <a:effectRef idx="2">
-            <a:schemeClr val="accent1"/>
-          </a:effectRef>
-          <a:fontRef idx="minor">
-            <a:schemeClr val="lt1"/>
-          </a:fontRef>
-        </p:style>
-        <p:txBody>
-          <a:bodyPr rtlCol="0" anchor="ctr" wrap="square"/>
-          <a:lstStyle/>
-          <a:p>
-            <a:pPr algn="ctr">
-              <a:defRPr sz="1800" b="1">
-                <a:solidFill>
-                  <a:srgbClr val="1E3C72"/>
-                </a:solidFill>
-              </a:defRPr>
-            </a:pPr>
-            <a:r>
-              <a:t>2. 宁俭勿奢</a:t>
-            </a:r>
-          </a:p>
-          <a:p>
-            <a:pPr>
-              <a:defRPr sz="1500">
-                <a:solidFill>
-                  <a:srgbClr val="333333"/>
-                </a:solidFill>
-              </a:defRPr>
-            </a:pPr>
-            <a:r>
-              <a:t>宁可简朴也不要奢侈——礼的精神在于真诚，不在于排场。</a:t>
-            </a:r>
-          </a:p>
-        </p:txBody>
-      </p:sp>
-      <p:sp>
-        <p:nvSpPr>
-          <p:cNvPr id="6" name="Rounded Rectangle 5"/>
-          <p:cNvSpPr/>
-          <p:nvPr/>
-        </p:nvSpPr>
-        <p:spPr>
-          <a:xfrm>
-            <a:off x="457200" y="3931920"/>
-            <a:ext cx="8229600" cy="1188720"/>
-          </a:xfrm>
-          <a:prstGeom prst="roundRect">
-            <a:avLst/>
-          </a:prstGeom>
-          <a:solidFill>
-            <a:srgbClr val="F5F5F0"/>
-          </a:solidFill>
-        </p:spPr>
-        <p:style>
-          <a:lnRef idx="1">
-            <a:schemeClr val="accent1"/>
-          </a:lnRef>
-          <a:fillRef idx="3">
-            <a:schemeClr val="accent1"/>
-          </a:fillRef>
-          <a:effectRef idx="2">
-            <a:schemeClr val="accent1"/>
-          </a:effectRef>
-          <a:fontRef idx="minor">
-            <a:schemeClr val="lt1"/>
-          </a:fontRef>
-        </p:style>
-        <p:txBody>
-          <a:bodyPr rtlCol="0" anchor="ctr" wrap="square"/>
-          <a:lstStyle/>
-          <a:p>
-            <a:pPr algn="ctr">
-              <a:defRPr sz="1800" b="1">
-                <a:solidFill>
-                  <a:srgbClr val="1E3C72"/>
-                </a:solidFill>
-              </a:defRPr>
-            </a:pPr>
-            <a:r>
-              <a:t>3. 保存仪节</a:t>
-            </a:r>
-          </a:p>
-          <a:p>
-            <a:pPr>
-              <a:defRPr sz="1500">
-                <a:solidFill>
-                  <a:srgbClr val="333333"/>
-                </a:solidFill>
-              </a:defRPr>
-            </a:pPr>
-            <a:r>
-              <a:t>有些形式即使看起来无用，但它是维持精神的一种方式——仪节不可轻易废去。</a:t>
-            </a:r>
-          </a:p>
-        </p:txBody>
-      </p:sp>
-      <p:sp>
-        <p:nvSpPr>
-          <p:cNvPr id="7" name="TextBox 6"/>
-          <p:cNvSpPr txBox="1"/>
-          <p:nvPr/>
-        </p:nvSpPr>
-        <p:spPr>
-          <a:xfrm>
-            <a:off x="8229600" y="6583680"/>
-            <a:ext cx="731520" cy="274320"/>
-          </a:xfrm>
-          <a:prstGeom prst="rect">
-            <a:avLst/>
-          </a:prstGeom>
-          <a:noFill/>
-        </p:spPr>
-        <p:txBody>
-          <a:bodyPr wrap="none">
-            <a:spAutoFit/>
-          </a:bodyPr>
-          <a:lstStyle/>
-          <a:p>
-            <a:pPr algn="r">
-              <a:defRPr sz="1200">
-                <a:solidFill>
-                  <a:srgbClr val="969696"/>
-                </a:solidFill>
-              </a:defRPr>
-            </a:pPr>
-            <a:r>
-              <a:t>12/14</a:t>
-            </a:r>
-          </a:p>
-        </p:txBody>
-      </p:sp>
-    </p:spTree>
-  </p:cSld>
-  <p:clrMapOvr>
-    <a:masterClrMapping/>
-  </p:clrMapOvr>
-</p:sld>
-</file>
-
-<file path=ppt/slides/slide13.xml><?xml version="1.0" encoding="utf-8"?>
-<p:sld xmlns:a="http://schemas.openxmlformats.org/drawingml/2006/main" xmlns:p="http://schemas.openxmlformats.org/presentationml/2006/main" xmlns:r="http://schemas.openxmlformats.org/officeDocument/2006/relationships">
-  <p:cSld>
-    <p:spTree>
-      <p:nvGrpSpPr>
-        <p:cNvPr id="1" name=""/>
-        <p:cNvGrpSpPr/>
-        <p:nvPr/>
-      </p:nvGrpSpPr>
-      <p:grpSpPr/>
-      <p:sp>
-        <p:nvSpPr>
-          <p:cNvPr id="2" name="Rectangle 1"/>
-          <p:cNvSpPr/>
-          <p:nvPr/>
-        </p:nvSpPr>
-        <p:spPr>
-          <a:xfrm>
-            <a:off x="0" y="0"/>
-            <a:ext cx="9144000" cy="1188720"/>
-          </a:xfrm>
-          <a:prstGeom prst="rect">
-            <a:avLst/>
-          </a:prstGeom>
-          <a:solidFill>
-            <a:srgbClr val="1E3C72"/>
-          </a:solidFill>
-          <a:ln>
-            <a:noFill/>
-          </a:ln>
-        </p:spPr>
-        <p:style>
-          <a:lnRef idx="1">
-            <a:schemeClr val="accent1"/>
-          </a:lnRef>
-          <a:fillRef idx="3">
-            <a:schemeClr val="accent1"/>
-          </a:fillRef>
-          <a:effectRef idx="2">
-            <a:schemeClr val="accent1"/>
-          </a:effectRef>
-          <a:fontRef idx="minor">
-            <a:schemeClr val="lt1"/>
-          </a:fontRef>
-        </p:style>
-        <p:txBody>
-          <a:bodyPr rtlCol="0" anchor="ctr"/>
-          <a:lstStyle/>
-          <a:p>
-            <a:pPr algn="ctr"/>
-          </a:p>
-        </p:txBody>
-      </p:sp>
-      <p:sp>
-        <p:nvSpPr>
-          <p:cNvPr id="3" name="TextBox 2"/>
-          <p:cNvSpPr txBox="1"/>
-          <p:nvPr/>
-        </p:nvSpPr>
-        <p:spPr>
-          <a:xfrm>
-            <a:off x="457200" y="228600"/>
-            <a:ext cx="8229600" cy="731520"/>
-          </a:xfrm>
-          <a:prstGeom prst="rect">
-            <a:avLst/>
-          </a:prstGeom>
-          <a:noFill/>
-        </p:spPr>
-        <p:txBody>
-          <a:bodyPr wrap="none">
-            <a:spAutoFit/>
-          </a:bodyPr>
-          <a:lstStyle/>
-          <a:p>
-            <a:pPr>
-              <a:defRPr sz="3400" b="1">
-                <a:solidFill>
-                  <a:srgbClr val="FFFFFF"/>
-                </a:solidFill>
-              </a:defRPr>
-            </a:pPr>
-            <a:r>
-              <a:t>Historical Background</a:t>
-            </a:r>
-          </a:p>
-        </p:txBody>
-      </p:sp>
-      <p:sp>
-        <p:nvSpPr>
-          <p:cNvPr id="4" name="Rounded Rectangle 3"/>
-          <p:cNvSpPr/>
-          <p:nvPr/>
-        </p:nvSpPr>
-        <p:spPr>
-          <a:xfrm>
-            <a:off x="457200" y="1371600"/>
-            <a:ext cx="8229600" cy="2286000"/>
-          </a:xfrm>
-          <a:prstGeom prst="roundRect">
-            <a:avLst/>
-          </a:prstGeom>
-          <a:solidFill>
-            <a:srgbClr val="F5F5F0"/>
-          </a:solidFill>
-        </p:spPr>
-        <p:style>
-          <a:lnRef idx="1">
-            <a:schemeClr val="accent1"/>
-          </a:lnRef>
-          <a:fillRef idx="3">
-            <a:schemeClr val="accent1"/>
-          </a:fillRef>
-          <a:effectRef idx="2">
-            <a:schemeClr val="accent1"/>
-          </a:effectRef>
-          <a:fontRef idx="minor">
-            <a:schemeClr val="lt1"/>
-          </a:fontRef>
-        </p:style>
-        <p:txBody>
-          <a:bodyPr rtlCol="0" anchor="ctr" wrap="square"/>
-          <a:lstStyle/>
-          <a:p>
-            <a:pPr algn="ctr">
-              <a:defRPr sz="1800" b="1">
-                <a:solidFill>
-                  <a:srgbClr val="1E3C72"/>
-                </a:solidFill>
-              </a:defRPr>
-            </a:pPr>
-            <a:r>
-              <a:t>Shi Ke Ren Shu Bu Ke Ren (是可忍孰不可忍) - Background</a:t>
-            </a:r>
-          </a:p>
-          <a:p>
-            <a:pPr>
-              <a:spcBef>
-                <a:spcPts val="800"/>
-              </a:spcBef>
-              <a:defRPr sz="1500">
-                <a:solidFill>
-                  <a:srgbClr val="333333"/>
-                </a:solidFill>
-              </a:defRPr>
-            </a:pPr>
-            <a:r>
-              <a:t>Ba Yi is a dance formation exclusive to the Emperor. Dukes could only use Liu Yi (36 people), and senior officials only Si Yi (16 people). Ji family, merely senior officials, used Ba Yi - a blatant challenge to Zhou rituals. Confucius, devoted to restoring Zhou rituals, was naturally extremely indignant. This chapter gives its name to the entire 'Ba Yi' section.</a:t>
-            </a:r>
-          </a:p>
-        </p:txBody>
-      </p:sp>
-      <p:sp>
-        <p:nvSpPr>
-          <p:cNvPr id="5" name="TextBox 4"/>
-          <p:cNvSpPr txBox="1"/>
-          <p:nvPr/>
-        </p:nvSpPr>
-        <p:spPr>
-          <a:xfrm>
-            <a:off x="8229600" y="6583680"/>
-            <a:ext cx="731520" cy="274320"/>
-          </a:xfrm>
-          <a:prstGeom prst="rect">
-            <a:avLst/>
-          </a:prstGeom>
-          <a:noFill/>
-        </p:spPr>
-        <p:txBody>
-          <a:bodyPr wrap="none">
-            <a:spAutoFit/>
-          </a:bodyPr>
-          <a:lstStyle/>
-          <a:p>
-            <a:pPr algn="r">
-              <a:defRPr sz="1200">
-                <a:solidFill>
-                  <a:srgbClr val="969696"/>
-                </a:solidFill>
-              </a:defRPr>
-            </a:pPr>
-            <a:r>
-              <a:t>13/14</a:t>
-            </a:r>
-          </a:p>
-        </p:txBody>
-      </p:sp>
-    </p:spTree>
-  </p:cSld>
-  <p:clrMapOvr>
-    <a:masterClrMapping/>
-  </p:clrMapOvr>
-</p:sld>
-</file>
-
-<file path=ppt/slides/slide14.xml><?xml version="1.0" encoding="utf-8"?>
-<p:sld xmlns:a="http://schemas.openxmlformats.org/drawingml/2006/main" xmlns:p="http://schemas.openxmlformats.org/presentationml/2006/main" xmlns:r="http://schemas.openxmlformats.org/officeDocument/2006/relationships">
-  <p:cSld>
-    <p:spTree>
-      <p:nvGrpSpPr>
-        <p:cNvPr id="1" name=""/>
-        <p:cNvGrpSpPr/>
-        <p:nvPr/>
-      </p:nvGrpSpPr>
-      <p:grpSpPr/>
-      <p:sp>
-        <p:nvSpPr>
-          <p:cNvPr id="2" name="Rectangle 1"/>
-          <p:cNvSpPr/>
-          <p:nvPr/>
-        </p:nvSpPr>
-        <p:spPr>
-          <a:xfrm>
-            <a:off x="0" y="0"/>
-            <a:ext cx="9144000" cy="1188720"/>
-          </a:xfrm>
-          <a:prstGeom prst="rect">
-            <a:avLst/>
-          </a:prstGeom>
-          <a:solidFill>
-            <a:srgbClr val="1E3C72"/>
-          </a:solidFill>
-          <a:ln>
-            <a:noFill/>
-          </a:ln>
-        </p:spPr>
-        <p:style>
-          <a:lnRef idx="1">
-            <a:schemeClr val="accent1"/>
-          </a:lnRef>
-          <a:fillRef idx="3">
-            <a:schemeClr val="accent1"/>
-          </a:fillRef>
-          <a:effectRef idx="2">
-            <a:schemeClr val="accent1"/>
-          </a:effectRef>
-          <a:fontRef idx="minor">
-            <a:schemeClr val="lt1"/>
-          </a:fontRef>
-        </p:style>
-        <p:txBody>
-          <a:bodyPr rtlCol="0" anchor="ctr"/>
-          <a:lstStyle/>
-          <a:p>
-            <a:pPr algn="ctr"/>
-          </a:p>
-        </p:txBody>
-      </p:sp>
-      <p:sp>
-        <p:nvSpPr>
-          <p:cNvPr id="3" name="TextBox 2"/>
-          <p:cNvSpPr txBox="1"/>
-          <p:nvPr/>
-        </p:nvSpPr>
-        <p:spPr>
-          <a:xfrm>
-            <a:off x="457200" y="228600"/>
-            <a:ext cx="8229600" cy="731520"/>
-          </a:xfrm>
-          <a:prstGeom prst="rect">
-            <a:avLst/>
-          </a:prstGeom>
-          <a:noFill/>
-        </p:spPr>
-        <p:txBody>
-          <a:bodyPr wrap="none">
-            <a:spAutoFit/>
-          </a:bodyPr>
-          <a:lstStyle/>
-          <a:p>
-            <a:pPr>
-              <a:defRPr sz="3400" b="1">
-                <a:solidFill>
-                  <a:srgbClr val="FFFFFF"/>
-                </a:solidFill>
-              </a:defRPr>
-            </a:pPr>
-            <a:r>
-              <a:t>Day 3 - Summary</a:t>
-            </a:r>
-          </a:p>
-        </p:txBody>
-      </p:sp>
-      <p:sp>
-        <p:nvSpPr>
-          <p:cNvPr id="4" name="Rounded Rectangle 3"/>
-          <p:cNvSpPr/>
-          <p:nvPr/>
-        </p:nvSpPr>
-        <p:spPr>
-          <a:xfrm>
-            <a:off x="457200" y="1371600"/>
-            <a:ext cx="8229600" cy="1280160"/>
-          </a:xfrm>
-          <a:prstGeom prst="roundRect">
-            <a:avLst/>
-          </a:prstGeom>
-          <a:solidFill>
-            <a:srgbClr val="F5F5F0"/>
-          </a:solidFill>
-        </p:spPr>
-        <p:style>
-          <a:lnRef idx="1">
-            <a:schemeClr val="accent1"/>
-          </a:lnRef>
-          <a:fillRef idx="3">
-            <a:schemeClr val="accent1"/>
-          </a:fillRef>
-          <a:effectRef idx="2">
-            <a:schemeClr val="accent1"/>
-          </a:effectRef>
-          <a:fontRef idx="minor">
-            <a:schemeClr val="lt1"/>
-          </a:fontRef>
-        </p:style>
-        <p:txBody>
-          <a:bodyPr rtlCol="0" anchor="ctr" wrap="square"/>
-          <a:lstStyle/>
-          <a:p>
-            <a:pPr algn="ctr">
-              <a:defRPr sz="1800" b="1">
-                <a:solidFill>
-                  <a:srgbClr val="1E3C72"/>
-                </a:solidFill>
-              </a:defRPr>
-            </a:pPr>
-            <a:r>
-              <a:t>Chapter 7: Shi Ke Ren Shu Bu Ke Ren (是可忍孰不可忍)</a:t>
-            </a:r>
-          </a:p>
-          <a:p>
-            <a:pPr>
-              <a:defRPr sz="1400">
-                <a:solidFill>
-                  <a:srgbClr val="333333"/>
-                </a:solidFill>
-              </a:defRPr>
-            </a:pPr>
-            <a:r>
-              <a:t>季氏用天子规格的乐舞，是公然僭越礼制——春秋末期礼崩乐坏的缩影。</a:t>
-            </a:r>
-          </a:p>
-        </p:txBody>
-      </p:sp>
-      <p:sp>
-        <p:nvSpPr>
-          <p:cNvPr id="5" name="Rounded Rectangle 4"/>
-          <p:cNvSpPr/>
-          <p:nvPr/>
-        </p:nvSpPr>
-        <p:spPr>
-          <a:xfrm>
-            <a:off x="457200" y="2743200"/>
-            <a:ext cx="8229600" cy="1280160"/>
-          </a:xfrm>
-          <a:prstGeom prst="roundRect">
-            <a:avLst/>
-          </a:prstGeom>
-          <a:solidFill>
-            <a:srgbClr val="F5F5F0"/>
-          </a:solidFill>
-        </p:spPr>
-        <p:style>
-          <a:lnRef idx="1">
-            <a:schemeClr val="accent1"/>
-          </a:lnRef>
-          <a:fillRef idx="3">
-            <a:schemeClr val="accent1"/>
-          </a:fillRef>
-          <a:effectRef idx="2">
-            <a:schemeClr val="accent1"/>
-          </a:effectRef>
-          <a:fontRef idx="minor">
-            <a:schemeClr val="lt1"/>
-          </a:fontRef>
-        </p:style>
-        <p:txBody>
-          <a:bodyPr rtlCol="0" anchor="ctr" wrap="square"/>
-          <a:lstStyle/>
-          <a:p>
-            <a:pPr algn="ctr">
-              <a:defRPr sz="1800" b="1">
-                <a:solidFill>
-                  <a:srgbClr val="1E3C72"/>
-                </a:solidFill>
-              </a:defRPr>
-            </a:pPr>
-            <a:r>
-              <a:t>Chapter 8: Yu Qi She Ye Ning Jian (与其奢也宁俭)</a:t>
-            </a:r>
-          </a:p>
-          <a:p>
-            <a:pPr>
-              <a:defRPr sz="1400">
-                <a:solidFill>
-                  <a:srgbClr val="333333"/>
-                </a:solidFill>
-              </a:defRPr>
-            </a:pPr>
-            <a:r>
-              <a:t>礼的根本不在形式，而在于内心——形式只是内心情感的外在表达。</a:t>
-            </a:r>
-          </a:p>
-        </p:txBody>
-      </p:sp>
-      <p:sp>
-        <p:nvSpPr>
-          <p:cNvPr id="6" name="Rounded Rectangle 5"/>
-          <p:cNvSpPr/>
-          <p:nvPr/>
-        </p:nvSpPr>
-        <p:spPr>
-          <a:xfrm>
-            <a:off x="457200" y="4114800"/>
-            <a:ext cx="8229600" cy="1280160"/>
-          </a:xfrm>
-          <a:prstGeom prst="roundRect">
-            <a:avLst/>
-          </a:prstGeom>
-          <a:solidFill>
-            <a:srgbClr val="F5F5F0"/>
-          </a:solidFill>
-        </p:spPr>
-        <p:style>
-          <a:lnRef idx="1">
-            <a:schemeClr val="accent1"/>
-          </a:lnRef>
-          <a:fillRef idx="3">
-            <a:schemeClr val="accent1"/>
-          </a:fillRef>
-          <a:effectRef idx="2">
-            <a:schemeClr val="accent1"/>
-          </a:effectRef>
-          <a:fontRef idx="minor">
-            <a:schemeClr val="lt1"/>
-          </a:fontRef>
-        </p:style>
-        <p:txBody>
-          <a:bodyPr rtlCol="0" anchor="ctr" wrap="square"/>
-          <a:lstStyle/>
-          <a:p>
-            <a:pPr algn="ctr">
-              <a:defRPr sz="1800" b="1">
-                <a:solidFill>
-                  <a:srgbClr val="1E3C72"/>
-                </a:solidFill>
-              </a:defRPr>
-            </a:pPr>
-            <a:r>
-              <a:t>Chapter 9: Gao Shuo Xi Yang (告朔饩羊)</a:t>
-            </a:r>
-          </a:p>
-          <a:p>
-            <a:pPr>
-              <a:defRPr sz="1400">
-                <a:solidFill>
-                  <a:srgbClr val="333333"/>
-                </a:solidFill>
-              </a:defRPr>
-            </a:pPr>
-            <a:r>
-              <a:t>羊只是形式，但形式承载着内容——去掉形式，内容也难以为继。</a:t>
-            </a:r>
-          </a:p>
-        </p:txBody>
-      </p:sp>
-      <p:sp>
-        <p:nvSpPr>
-          <p:cNvPr id="7" name="Rounded Rectangle 6"/>
-          <p:cNvSpPr/>
-          <p:nvPr/>
-        </p:nvSpPr>
-        <p:spPr>
-          <a:xfrm>
-            <a:off x="457200" y="5577840"/>
-            <a:ext cx="8229600" cy="914400"/>
-          </a:xfrm>
-          <a:prstGeom prst="roundRect">
-            <a:avLst/>
-          </a:prstGeom>
-          <a:solidFill>
-            <a:srgbClr val="1E3C72"/>
-          </a:solidFill>
-        </p:spPr>
-        <p:style>
-          <a:lnRef idx="1">
-            <a:schemeClr val="accent1"/>
-          </a:lnRef>
-          <a:fillRef idx="3">
-            <a:schemeClr val="accent1"/>
-          </a:fillRef>
-          <a:effectRef idx="2">
-            <a:schemeClr val="accent1"/>
-          </a:effectRef>
-          <a:fontRef idx="minor">
-            <a:schemeClr val="lt1"/>
-          </a:fontRef>
-        </p:style>
-        <p:txBody>
-          <a:bodyPr rtlCol="0" anchor="ctr" wrap="square"/>
-          <a:lstStyle/>
-          <a:p>
-            <a:pPr algn="ctr">
-              <a:defRPr sz="2200" b="1">
-                <a:solidFill>
-                  <a:srgbClr val="FFFFFF"/>
-                </a:solidFill>
-              </a:defRPr>
-            </a:pPr>
-            <a:r>
-              <a:t>Kongzi Wei Ji Shi:</a:t>
-            </a:r>
-          </a:p>
-        </p:txBody>
-      </p:sp>
-      <p:sp>
-        <p:nvSpPr>
-          <p:cNvPr id="8" name="TextBox 7"/>
-          <p:cNvSpPr txBox="1"/>
-          <p:nvPr/>
-        </p:nvSpPr>
-        <p:spPr>
-          <a:xfrm>
-            <a:off x="8229600" y="6583680"/>
-            <a:ext cx="731520" cy="274320"/>
-          </a:xfrm>
-          <a:prstGeom prst="rect">
-            <a:avLst/>
-          </a:prstGeom>
-          <a:noFill/>
-        </p:spPr>
-        <p:txBody>
-          <a:bodyPr wrap="none">
-            <a:spAutoFit/>
-          </a:bodyPr>
-          <a:lstStyle/>
-          <a:p>
-            <a:pPr algn="r">
-              <a:defRPr sz="1200">
-                <a:solidFill>
-                  <a:srgbClr val="969696"/>
-                </a:solidFill>
-              </a:defRPr>
-            </a:pPr>
-            <a:r>
-              <a:t>14/14</a:t>
-            </a:r>
-          </a:p>
-        </p:txBody>
-      </p:sp>
-    </p:spTree>
-  </p:cSld>
-  <p:clrMapOvr>
-    <a:masterClrMapping/>
-  </p:clrMapOvr>
-</p:sld>
-</file>
-
-<file path=ppt/slides/slide2.xml><?xml version="1.0" encoding="utf-8"?>
-<p:sld xmlns:a="http://schemas.openxmlformats.org/drawingml/2006/main" xmlns:p="http://schemas.openxmlformats.org/presentationml/2006/main" xmlns:r="http://schemas.openxmlformats.org/officeDocument/2006/relationships">
-  <p:cSld>
-    <p:spTree>
-      <p:nvGrpSpPr>
-        <p:cNvPr id="1" name=""/>
-        <p:cNvGrpSpPr/>
-        <p:nvPr/>
-      </p:nvGrpSpPr>
-      <p:grpSpPr/>
-      <p:sp>
-        <p:nvSpPr>
-          <p:cNvPr id="2" name="Rectangle 1"/>
-          <p:cNvSpPr/>
-          <p:nvPr/>
-        </p:nvSpPr>
-        <p:spPr>
-          <a:xfrm>
-            <a:off x="0" y="0"/>
-            <a:ext cx="9144000" cy="1188720"/>
-          </a:xfrm>
-          <a:prstGeom prst="rect">
-            <a:avLst/>
-          </a:prstGeom>
-          <a:solidFill>
-            <a:srgbClr val="1E3C72"/>
-          </a:solidFill>
-          <a:ln>
-            <a:noFill/>
-          </a:ln>
-        </p:spPr>
-        <p:style>
-          <a:lnRef idx="1">
-            <a:schemeClr val="accent1"/>
-          </a:lnRef>
-          <a:fillRef idx="3">
-            <a:schemeClr val="accent1"/>
-          </a:fillRef>
-          <a:effectRef idx="2">
-            <a:schemeClr val="accent1"/>
-          </a:effectRef>
-          <a:fontRef idx="minor">
-            <a:schemeClr val="lt1"/>
-          </a:fontRef>
-        </p:style>
-        <p:txBody>
-          <a:bodyPr rtlCol="0" anchor="ctr"/>
-          <a:lstStyle/>
-          <a:p>
-            <a:pPr algn="ctr"/>
-          </a:p>
-        </p:txBody>
-      </p:sp>
-      <p:sp>
-        <p:nvSpPr>
-          <p:cNvPr id="3" name="TextBox 2"/>
-          <p:cNvSpPr txBox="1"/>
-          <p:nvPr/>
-        </p:nvSpPr>
-        <p:spPr>
-          <a:xfrm>
-            <a:off x="457200" y="228600"/>
-            <a:ext cx="8229600" cy="731520"/>
-          </a:xfrm>
-          <a:prstGeom prst="rect">
-            <a:avLst/>
-          </a:prstGeom>
-          <a:noFill/>
-        </p:spPr>
-        <p:txBody>
-          <a:bodyPr wrap="none">
-            <a:spAutoFit/>
-          </a:bodyPr>
-          <a:lstStyle/>
-          <a:p>
-            <a:pPr>
-              <a:defRPr sz="3400" b="1">
-                <a:solidFill>
-                  <a:srgbClr val="FFFFFF"/>
-                </a:solidFill>
-              </a:defRPr>
-            </a:pPr>
-            <a:r>
-              <a:t>Chapter 7 - Shi Ke Ren Shu Bu Ke Ren (是可忍孰不可忍)</a:t>
-            </a:r>
-          </a:p>
-        </p:txBody>
-      </p:sp>
-      <p:sp>
-        <p:nvSpPr>
-          <p:cNvPr id="4" name="Rounded Rectangle 3"/>
-          <p:cNvSpPr/>
-          <p:nvPr/>
-        </p:nvSpPr>
-        <p:spPr>
-          <a:xfrm>
-            <a:off x="457200" y="1371600"/>
-            <a:ext cx="8229600" cy="3474720"/>
-          </a:xfrm>
-          <a:prstGeom prst="roundRect">
-            <a:avLst/>
-          </a:prstGeom>
-          <a:solidFill>
-            <a:srgbClr val="F5F5F0"/>
-          </a:solidFill>
-        </p:spPr>
-        <p:style>
-          <a:lnRef idx="1">
-            <a:schemeClr val="accent1"/>
-          </a:lnRef>
-          <a:fillRef idx="3">
-            <a:schemeClr val="accent1"/>
-          </a:fillRef>
-          <a:effectRef idx="2">
-            <a:schemeClr val="accent1"/>
-          </a:effectRef>
-          <a:fontRef idx="minor">
-            <a:schemeClr val="lt1"/>
-          </a:fontRef>
-        </p:style>
-        <p:txBody>
-          <a:bodyPr rtlCol="0" anchor="ctr" wrap="square"/>
-          <a:lstStyle/>
-          <a:p>
-            <a:pPr algn="ctr">
-              <a:defRPr sz="1800" b="1">
-                <a:solidFill>
-                  <a:srgbClr val="1E3C72"/>
-                </a:solidFill>
-              </a:defRPr>
-            </a:pPr>
-            <a:r>
-              <a:t>[Original Text]</a:t>
-            </a:r>
-          </a:p>
-          <a:p>
-            <a:pPr>
-              <a:spcBef>
-                <a:spcPts val="400"/>
-              </a:spcBef>
-              <a:defRPr sz="2200">
-                <a:solidFill>
-                  <a:srgbClr val="333333"/>
-                </a:solidFill>
-              </a:defRPr>
-            </a:pPr>
-            <a:r>
-              <a:t>Kongzi Wei Ji Shi:</a:t>
-            </a:r>
-          </a:p>
-          <a:p>
-            <a:pPr>
-              <a:spcBef>
-                <a:spcPts val="400"/>
-              </a:spcBef>
-              <a:defRPr sz="2200">
-                <a:solidFill>
-                  <a:srgbClr val="333333"/>
-                </a:solidFill>
-              </a:defRPr>
-            </a:pPr>
-            <a:r>
-              <a:t>'Ba Yi Wu Yu Ting, Shi Ke Ren Ye, Shu Bu Ke Ren Ye?'</a:t>
-            </a:r>
-          </a:p>
-        </p:txBody>
-      </p:sp>
-      <p:sp>
-        <p:nvSpPr>
-          <p:cNvPr id="5" name="Rounded Rectangle 4"/>
-          <p:cNvSpPr/>
-          <p:nvPr/>
-        </p:nvSpPr>
-        <p:spPr>
-          <a:xfrm>
-            <a:off x="457200" y="4937760"/>
-            <a:ext cx="8229600" cy="1005840"/>
-          </a:xfrm>
-          <a:prstGeom prst="roundRect">
-            <a:avLst/>
-          </a:prstGeom>
-          <a:solidFill>
-            <a:srgbClr val="4682B4"/>
-          </a:solidFill>
-        </p:spPr>
-        <p:style>
-          <a:lnRef idx="1">
-            <a:schemeClr val="accent1"/>
-          </a:lnRef>
-          <a:fillRef idx="3">
-            <a:schemeClr val="accent1"/>
-          </a:fillRef>
-          <a:effectRef idx="2">
-            <a:schemeClr val="accent1"/>
-          </a:effectRef>
-          <a:fontRef idx="minor">
-            <a:schemeClr val="lt1"/>
-          </a:fontRef>
-        </p:style>
-        <p:txBody>
-          <a:bodyPr rtlCol="0" anchor="ctr" wrap="square"/>
-          <a:lstStyle/>
-          <a:p>
-            <a:pPr algn="ctr">
-              <a:defRPr sz="1600">
-                <a:solidFill>
-                  <a:srgbClr val="FFFFFF"/>
-                </a:solidFill>
-              </a:defRPr>
-            </a:pPr>
-            <a:r>
-              <a:t>[Translation] 孔子谈到季孙氏说：他用八佾的规格在庭院奏乐舞蹈，这样的事都忍心做得出来，还有什么事是他不忍心做的呢？</a:t>
-            </a:r>
-          </a:p>
-          <a:p>
-            <a:pPr>
-              <a:defRPr sz="1500" i="1">
-                <a:solidFill>
-                  <a:srgbClr val="DCDCFF"/>
-                </a:solidFill>
-              </a:defRPr>
-            </a:pPr>
-            <a:r>
-              <a:t>[EN] Confucius commented on the Ji family: 'Using the eight-row formation in their hall - if this can be tolerated, what cannot? This was a violation of ritual propriety.'</a:t>
-            </a:r>
-          </a:p>
-        </p:txBody>
-      </p:sp>
-      <p:sp>
-        <p:nvSpPr>
-          <p:cNvPr id="6" name="TextBox 5"/>
-          <p:cNvSpPr txBox="1"/>
-          <p:nvPr/>
-        </p:nvSpPr>
-        <p:spPr>
-          <a:xfrm>
-            <a:off x="8229600" y="6583680"/>
-            <a:ext cx="731520" cy="274320"/>
-          </a:xfrm>
-          <a:prstGeom prst="rect">
-            <a:avLst/>
-          </a:prstGeom>
-          <a:noFill/>
-        </p:spPr>
-        <p:txBody>
-          <a:bodyPr wrap="none">
-            <a:spAutoFit/>
-          </a:bodyPr>
-          <a:lstStyle/>
-          <a:p>
-            <a:pPr algn="r">
-              <a:defRPr sz="1200">
-                <a:solidFill>
-                  <a:srgbClr val="969696"/>
-                </a:solidFill>
-              </a:defRPr>
-            </a:pPr>
-            <a:r>
               <a:t>2/14</a:t>
-            </a:r>
-          </a:p>
-        </p:txBody>
-      </p:sp>
-    </p:spTree>
-  </p:cSld>
-  <p:clrMapOvr>
-    <a:masterClrMapping/>
-  </p:clrMapOvr>
-</p:sld>
-</file>
-
-<file path=ppt/slides/slide3.xml><?xml version="1.0" encoding="utf-8"?>
-<p:sld xmlns:a="http://schemas.openxmlformats.org/drawingml/2006/main" xmlns:p="http://schemas.openxmlformats.org/presentationml/2006/main" xmlns:r="http://schemas.openxmlformats.org/officeDocument/2006/relationships">
-  <p:cSld>
-    <p:spTree>
-      <p:nvGrpSpPr>
-        <p:cNvPr id="1" name=""/>
-        <p:cNvGrpSpPr/>
-        <p:nvPr/>
-      </p:nvGrpSpPr>
-      <p:grpSpPr/>
-      <p:sp>
-        <p:nvSpPr>
-          <p:cNvPr id="2" name="Rectangle 1"/>
-          <p:cNvSpPr/>
-          <p:nvPr/>
-        </p:nvSpPr>
-        <p:spPr>
-          <a:xfrm>
-            <a:off x="0" y="0"/>
-            <a:ext cx="9144000" cy="1188720"/>
-          </a:xfrm>
-          <a:prstGeom prst="rect">
-            <a:avLst/>
-          </a:prstGeom>
-          <a:solidFill>
-            <a:srgbClr val="1E3C72"/>
-          </a:solidFill>
-          <a:ln>
-            <a:noFill/>
-          </a:ln>
-        </p:spPr>
-        <p:style>
-          <a:lnRef idx="1">
-            <a:schemeClr val="accent1"/>
-          </a:lnRef>
-          <a:fillRef idx="3">
-            <a:schemeClr val="accent1"/>
-          </a:fillRef>
-          <a:effectRef idx="2">
-            <a:schemeClr val="accent1"/>
-          </a:effectRef>
-          <a:fontRef idx="minor">
-            <a:schemeClr val="lt1"/>
-          </a:fontRef>
-        </p:style>
-        <p:txBody>
-          <a:bodyPr rtlCol="0" anchor="ctr"/>
-          <a:lstStyle/>
-          <a:p>
-            <a:pPr algn="ctr"/>
-          </a:p>
-        </p:txBody>
-      </p:sp>
-      <p:sp>
-        <p:nvSpPr>
-          <p:cNvPr id="3" name="TextBox 2"/>
-          <p:cNvSpPr txBox="1"/>
-          <p:nvPr/>
-        </p:nvSpPr>
-        <p:spPr>
-          <a:xfrm>
-            <a:off x="457200" y="228600"/>
-            <a:ext cx="8229600" cy="731520"/>
-          </a:xfrm>
-          <a:prstGeom prst="rect">
-            <a:avLst/>
-          </a:prstGeom>
-          <a:noFill/>
-        </p:spPr>
-        <p:txBody>
-          <a:bodyPr wrap="none">
-            <a:spAutoFit/>
-          </a:bodyPr>
-          <a:lstStyle/>
-          <a:p>
-            <a:pPr>
-              <a:defRPr sz="3400" b="1">
-                <a:solidFill>
-                  <a:srgbClr val="FFFFFF"/>
-                </a:solidFill>
-              </a:defRPr>
-            </a:pPr>
-            <a:r>
-              <a:t>Chapter 7 - Shi Ke Ren Shu Bu Ke Ren (是可忍孰不可忍) [Annotations]</a:t>
-            </a:r>
-          </a:p>
-        </p:txBody>
-      </p:sp>
-      <p:sp>
-        <p:nvSpPr>
-          <p:cNvPr id="4" name="Rounded Rectangle 3"/>
-          <p:cNvSpPr/>
-          <p:nvPr/>
-        </p:nvSpPr>
-        <p:spPr>
-          <a:xfrm>
-            <a:off x="457200" y="1371600"/>
-            <a:ext cx="8229600" cy="3840480"/>
-          </a:xfrm>
-          <a:prstGeom prst="roundRect">
-            <a:avLst/>
-          </a:prstGeom>
-          <a:solidFill>
-            <a:srgbClr val="F5F5F0"/>
-          </a:solidFill>
-        </p:spPr>
-        <p:style>
-          <a:lnRef idx="1">
-            <a:schemeClr val="accent1"/>
-          </a:lnRef>
-          <a:fillRef idx="3">
-            <a:schemeClr val="accent1"/>
-          </a:fillRef>
-          <a:effectRef idx="2">
-            <a:schemeClr val="accent1"/>
-          </a:effectRef>
-          <a:fontRef idx="minor">
-            <a:schemeClr val="lt1"/>
-          </a:fontRef>
-        </p:style>
-        <p:txBody>
-          <a:bodyPr rtlCol="0" anchor="ctr" wrap="square"/>
-          <a:lstStyle/>
-          <a:p>
-            <a:pPr algn="ctr">
-              <a:defRPr sz="1800" b="1">
-                <a:solidFill>
-                  <a:srgbClr val="1E3C72"/>
-                </a:solidFill>
-              </a:defRPr>
-            </a:pPr>
-            <a:r>
-              <a:t>[Annotations]</a:t>
-            </a:r>
-          </a:p>
-          <a:p>
-            <a:pPr>
-              <a:spcBef>
-                <a:spcPts val="500"/>
-              </a:spcBef>
-              <a:defRPr sz="1700">
-                <a:solidFill>
-                  <a:srgbClr val="333333"/>
-                </a:solidFill>
-              </a:defRPr>
-            </a:pPr>
-            <a:r>
-              <a:t>* Ji Shi (季氏): Ji Sun clan, senior official in Lu</a:t>
-            </a:r>
-          </a:p>
-          <a:p>
-            <a:pPr>
-              <a:spcBef>
-                <a:spcPts val="500"/>
-              </a:spcBef>
-              <a:defRPr sz="1700">
-                <a:solidFill>
-                  <a:srgbClr val="333333"/>
-                </a:solidFill>
-              </a:defRPr>
-            </a:pPr>
-            <a:r>
-              <a:t>* Ba Yi (八佾): Dance formation for the Emperor - 64 people; Ba Yi is the rank of dukes</a:t>
-            </a:r>
-          </a:p>
-          <a:p>
-            <a:pPr>
-              <a:spcBef>
-                <a:spcPts val="500"/>
-              </a:spcBef>
-              <a:defRPr sz="1700">
-                <a:solidFill>
-                  <a:srgbClr val="333333"/>
-                </a:solidFill>
-              </a:defRPr>
-            </a:pPr>
-            <a:r>
-              <a:t>* Ren (忍): Tolerate, endure; also means '忍心' (have the heart to)</a:t>
-            </a:r>
-          </a:p>
-        </p:txBody>
-      </p:sp>
-      <p:sp>
-        <p:nvSpPr>
-          <p:cNvPr id="5" name="TextBox 4"/>
-          <p:cNvSpPr txBox="1"/>
-          <p:nvPr/>
-        </p:nvSpPr>
-        <p:spPr>
-          <a:xfrm>
-            <a:off x="8229600" y="6583680"/>
-            <a:ext cx="731520" cy="274320"/>
-          </a:xfrm>
-          <a:prstGeom prst="rect">
-            <a:avLst/>
-          </a:prstGeom>
-          <a:noFill/>
-        </p:spPr>
-        <p:txBody>
-          <a:bodyPr wrap="none">
-            <a:spAutoFit/>
-          </a:bodyPr>
-          <a:lstStyle/>
-          <a:p>
-            <a:pPr algn="r">
-              <a:defRPr sz="1200">
-                <a:solidFill>
-                  <a:srgbClr val="969696"/>
-                </a:solidFill>
-              </a:defRPr>
-            </a:pPr>
-            <a:r>
-              <a:t>3/14</a:t>
-            </a:r>
-          </a:p>
-        </p:txBody>
-      </p:sp>
-    </p:spTree>
-  </p:cSld>
-  <p:clrMapOvr>
-    <a:masterClrMapping/>
-  </p:clrMapOvr>
-</p:sld>
-</file>
-
-<file path=ppt/slides/slide4.xml><?xml version="1.0" encoding="utf-8"?>
-<p:sld xmlns:a="http://schemas.openxmlformats.org/drawingml/2006/main" xmlns:p="http://schemas.openxmlformats.org/presentationml/2006/main" xmlns:r="http://schemas.openxmlformats.org/officeDocument/2006/relationships">
-  <p:cSld>
-    <p:spTree>
-      <p:nvGrpSpPr>
-        <p:cNvPr id="1" name=""/>
-        <p:cNvGrpSpPr/>
-        <p:nvPr/>
-      </p:nvGrpSpPr>
-      <p:grpSpPr/>
-      <p:sp>
-        <p:nvSpPr>
-          <p:cNvPr id="2" name="Rectangle 1"/>
-          <p:cNvSpPr/>
-          <p:nvPr/>
-        </p:nvSpPr>
-        <p:spPr>
-          <a:xfrm>
-            <a:off x="0" y="0"/>
-            <a:ext cx="9144000" cy="1188720"/>
-          </a:xfrm>
-          <a:prstGeom prst="rect">
-            <a:avLst/>
-          </a:prstGeom>
-          <a:solidFill>
-            <a:srgbClr val="1E3C72"/>
-          </a:solidFill>
-          <a:ln>
-            <a:noFill/>
-          </a:ln>
-        </p:spPr>
-        <p:style>
-          <a:lnRef idx="1">
-            <a:schemeClr val="accent1"/>
-          </a:lnRef>
-          <a:fillRef idx="3">
-            <a:schemeClr val="accent1"/>
-          </a:fillRef>
-          <a:effectRef idx="2">
-            <a:schemeClr val="accent1"/>
-          </a:effectRef>
-          <a:fontRef idx="minor">
-            <a:schemeClr val="lt1"/>
-          </a:fontRef>
-        </p:style>
-        <p:txBody>
-          <a:bodyPr rtlCol="0" anchor="ctr"/>
-          <a:lstStyle/>
-          <a:p>
-            <a:pPr algn="ctr"/>
-          </a:p>
-        </p:txBody>
-      </p:sp>
-      <p:sp>
-        <p:nvSpPr>
-          <p:cNvPr id="3" name="TextBox 2"/>
-          <p:cNvSpPr txBox="1"/>
-          <p:nvPr/>
-        </p:nvSpPr>
-        <p:spPr>
-          <a:xfrm>
-            <a:off x="457200" y="228600"/>
-            <a:ext cx="8229600" cy="731520"/>
-          </a:xfrm>
-          <a:prstGeom prst="rect">
-            <a:avLst/>
-          </a:prstGeom>
-          <a:noFill/>
-        </p:spPr>
-        <p:txBody>
-          <a:bodyPr wrap="none">
-            <a:spAutoFit/>
-          </a:bodyPr>
-          <a:lstStyle/>
-          <a:p>
-            <a:pPr>
-              <a:defRPr sz="3400" b="1">
-                <a:solidFill>
-                  <a:srgbClr val="FFFFFF"/>
-                </a:solidFill>
-              </a:defRPr>
-            </a:pPr>
-            <a:r>
-              <a:t>Chapter 7 - Core Ideas</a:t>
-            </a:r>
-          </a:p>
-        </p:txBody>
-      </p:sp>
-      <p:sp>
-        <p:nvSpPr>
-          <p:cNvPr id="4" name="Rounded Rectangle 3"/>
-          <p:cNvSpPr/>
-          <p:nvPr/>
-        </p:nvSpPr>
-        <p:spPr>
-          <a:xfrm>
-            <a:off x="457200" y="1371600"/>
-            <a:ext cx="8229600" cy="1371600"/>
-          </a:xfrm>
-          <a:prstGeom prst="roundRect">
-            <a:avLst/>
-          </a:prstGeom>
-          <a:solidFill>
-            <a:srgbClr val="4682B4"/>
-          </a:solidFill>
-        </p:spPr>
-        <p:style>
-          <a:lnRef idx="1">
-            <a:schemeClr val="accent1"/>
-          </a:lnRef>
-          <a:fillRef idx="3">
-            <a:schemeClr val="accent1"/>
-          </a:fillRef>
-          <a:effectRef idx="2">
-            <a:schemeClr val="accent1"/>
-          </a:effectRef>
-          <a:fontRef idx="minor">
-            <a:schemeClr val="lt1"/>
-          </a:fontRef>
-        </p:style>
-        <p:txBody>
-          <a:bodyPr rtlCol="0" anchor="ctr" wrap="square"/>
-          <a:lstStyle/>
-          <a:p>
-            <a:pPr algn="ctr">
-              <a:defRPr sz="2000" b="1">
-                <a:solidFill>
-                  <a:srgbClr val="FFFFFF"/>
-                </a:solidFill>
-              </a:defRPr>
-            </a:pPr>
-            <a:r>
-              <a:t>Core Concept</a:t>
-            </a:r>
-          </a:p>
-          <a:p>
-            <a:pPr>
-              <a:defRPr sz="1700">
-                <a:solidFill>
-                  <a:srgbClr val="E6E6E6"/>
-                </a:solidFill>
-              </a:defRPr>
-            </a:pPr>
-            <a:r>
-              <a:t>是可忍孰不可忍: This phrase is widely used today but often deviates from its original m...</a:t>
-            </a:r>
-          </a:p>
-        </p:txBody>
-      </p:sp>
-      <p:sp>
-        <p:nvSpPr>
-          <p:cNvPr id="5" name="TextBox 4"/>
-          <p:cNvSpPr txBox="1"/>
-          <p:nvPr/>
-        </p:nvSpPr>
-        <p:spPr>
-          <a:xfrm>
-            <a:off x="457200" y="2926080"/>
-            <a:ext cx="8229600" cy="1097280"/>
-          </a:xfrm>
-          <a:prstGeom prst="rect">
-            <a:avLst/>
-          </a:prstGeom>
-          <a:noFill/>
-        </p:spPr>
-        <p:txBody>
-          <a:bodyPr wrap="square">
-            <a:spAutoFit/>
-          </a:bodyPr>
-          <a:lstStyle/>
-          <a:p>
-            <a:pPr>
-              <a:defRPr sz="1900" b="1">
-                <a:solidFill>
-                  <a:srgbClr val="1E3C72"/>
-                </a:solidFill>
-              </a:defRPr>
-            </a:pPr>
-            <a:r>
-              <a:t>1. 礼崩乐坏</a:t>
-            </a:r>
-          </a:p>
-          <a:p>
-            <a:pPr>
-              <a:defRPr sz="1600">
-                <a:solidFill>
-                  <a:srgbClr val="333333"/>
-                </a:solidFill>
-              </a:defRPr>
-            </a:pPr>
-            <a:r>
-              <a:t>季氏用天子规格的乐舞，是公然僭越礼制——春秋末期礼崩乐坏的缩影。</a:t>
-            </a:r>
-          </a:p>
-        </p:txBody>
-      </p:sp>
-      <p:sp>
-        <p:nvSpPr>
-          <p:cNvPr id="6" name="TextBox 5"/>
-          <p:cNvSpPr txBox="1"/>
-          <p:nvPr/>
-        </p:nvSpPr>
-        <p:spPr>
-          <a:xfrm>
-            <a:off x="457200" y="4023360"/>
-            <a:ext cx="8229600" cy="1097280"/>
-          </a:xfrm>
-          <a:prstGeom prst="rect">
-            <a:avLst/>
-          </a:prstGeom>
-          <a:noFill/>
-        </p:spPr>
-        <p:txBody>
-          <a:bodyPr wrap="square">
-            <a:spAutoFit/>
-          </a:bodyPr>
-          <a:lstStyle/>
-          <a:p>
-            <a:pPr>
-              <a:defRPr sz="1900" b="1">
-                <a:solidFill>
-                  <a:srgbClr val="1E3C72"/>
-                </a:solidFill>
-              </a:defRPr>
-            </a:pPr>
-            <a:r>
-              <a:t>2. 是可忍孰不可忍</a:t>
-            </a:r>
-          </a:p>
-          <a:p>
-            <a:pPr>
-              <a:defRPr sz="1600">
-                <a:solidFill>
-                  <a:srgbClr val="333333"/>
-                </a:solidFill>
-              </a:defRPr>
-            </a:pPr>
-            <a:r>
-              <a:t>孔子对此极为愤慨——礼制不是形式，而是社会秩序的基石。</a:t>
-            </a:r>
-          </a:p>
-        </p:txBody>
-      </p:sp>
-      <p:sp>
-        <p:nvSpPr>
-          <p:cNvPr id="7" name="TextBox 6"/>
-          <p:cNvSpPr txBox="1"/>
-          <p:nvPr/>
-        </p:nvSpPr>
-        <p:spPr>
-          <a:xfrm>
-            <a:off x="457200" y="5120640"/>
-            <a:ext cx="8229600" cy="1097280"/>
-          </a:xfrm>
-          <a:prstGeom prst="rect">
-            <a:avLst/>
-          </a:prstGeom>
-          <a:noFill/>
-        </p:spPr>
-        <p:txBody>
-          <a:bodyPr wrap="square">
-            <a:spAutoFit/>
-          </a:bodyPr>
-          <a:lstStyle/>
-          <a:p>
-            <a:pPr>
-              <a:defRPr sz="1900" b="1">
-                <a:solidFill>
-                  <a:srgbClr val="1E3C72"/>
-                </a:solidFill>
-              </a:defRPr>
-            </a:pPr>
-            <a:r>
-              <a:t>3. 礼的根本</a:t>
-            </a:r>
-          </a:p>
-          <a:p>
-            <a:pPr>
-              <a:defRPr sz="1600">
-                <a:solidFill>
-                  <a:srgbClr val="333333"/>
-                </a:solidFill>
-              </a:defRPr>
-            </a:pPr>
-            <a:r>
-              <a:t>礼制背后是秩序和尊重，破坏礼制就是破坏社会根基——千里之堤，溃于蚁穴。</a:t>
-            </a:r>
-          </a:p>
-        </p:txBody>
-      </p:sp>
-      <p:sp>
-        <p:nvSpPr>
-          <p:cNvPr id="8" name="TextBox 7"/>
-          <p:cNvSpPr txBox="1"/>
-          <p:nvPr/>
-        </p:nvSpPr>
-        <p:spPr>
-          <a:xfrm>
-            <a:off x="8229600" y="6583680"/>
-            <a:ext cx="731520" cy="274320"/>
-          </a:xfrm>
-          <a:prstGeom prst="rect">
-            <a:avLst/>
-          </a:prstGeom>
-          <a:noFill/>
-        </p:spPr>
-        <p:txBody>
-          <a:bodyPr wrap="none">
-            <a:spAutoFit/>
-          </a:bodyPr>
-          <a:lstStyle/>
-          <a:p>
-            <a:pPr algn="r">
-              <a:defRPr sz="1200">
-                <a:solidFill>
-                  <a:srgbClr val="969696"/>
-                </a:solidFill>
-              </a:defRPr>
-            </a:pPr>
-            <a:r>
-              <a:t>4/14</a:t>
-            </a:r>
-          </a:p>
-        </p:txBody>
-      </p:sp>
-    </p:spTree>
-  </p:cSld>
-  <p:clrMapOvr>
-    <a:masterClrMapping/>
-  </p:clrMapOvr>
-</p:sld>
-</file>
-
-<file path=ppt/slides/slide5.xml><?xml version="1.0" encoding="utf-8"?>
-<p:sld xmlns:a="http://schemas.openxmlformats.org/drawingml/2006/main" xmlns:p="http://schemas.openxmlformats.org/presentationml/2006/main" xmlns:r="http://schemas.openxmlformats.org/officeDocument/2006/relationships">
-  <p:cSld>
-    <p:spTree>
-      <p:nvGrpSpPr>
-        <p:cNvPr id="1" name=""/>
-        <p:cNvGrpSpPr/>
-        <p:nvPr/>
-      </p:nvGrpSpPr>
-      <p:grpSpPr/>
-      <p:sp>
-        <p:nvSpPr>
-          <p:cNvPr id="2" name="Rectangle 1"/>
-          <p:cNvSpPr/>
-          <p:nvPr/>
-        </p:nvSpPr>
-        <p:spPr>
-          <a:xfrm>
-            <a:off x="0" y="0"/>
-            <a:ext cx="9144000" cy="1188720"/>
-          </a:xfrm>
-          <a:prstGeom prst="rect">
-            <a:avLst/>
-          </a:prstGeom>
-          <a:solidFill>
-            <a:srgbClr val="1E3C72"/>
-          </a:solidFill>
-          <a:ln>
-            <a:noFill/>
-          </a:ln>
-        </p:spPr>
-        <p:style>
-          <a:lnRef idx="1">
-            <a:schemeClr val="accent1"/>
-          </a:lnRef>
-          <a:fillRef idx="3">
-            <a:schemeClr val="accent1"/>
-          </a:fillRef>
-          <a:effectRef idx="2">
-            <a:schemeClr val="accent1"/>
-          </a:effectRef>
-          <a:fontRef idx="minor">
-            <a:schemeClr val="lt1"/>
-          </a:fontRef>
-        </p:style>
-        <p:txBody>
-          <a:bodyPr rtlCol="0" anchor="ctr"/>
-          <a:lstStyle/>
-          <a:p>
-            <a:pPr algn="ctr"/>
-          </a:p>
-        </p:txBody>
-      </p:sp>
-      <p:sp>
-        <p:nvSpPr>
-          <p:cNvPr id="3" name="TextBox 2"/>
-          <p:cNvSpPr txBox="1"/>
-          <p:nvPr/>
-        </p:nvSpPr>
-        <p:spPr>
-          <a:xfrm>
-            <a:off x="457200" y="228600"/>
-            <a:ext cx="8229600" cy="731520"/>
-          </a:xfrm>
-          <a:prstGeom prst="rect">
-            <a:avLst/>
-          </a:prstGeom>
-          <a:noFill/>
-        </p:spPr>
-        <p:txBody>
-          <a:bodyPr wrap="none">
-            <a:spAutoFit/>
-          </a:bodyPr>
-          <a:lstStyle/>
-          <a:p>
-            <a:pPr>
-              <a:defRPr sz="3400" b="1">
-                <a:solidFill>
-                  <a:srgbClr val="FFFFFF"/>
-                </a:solidFill>
-              </a:defRPr>
-            </a:pPr>
-            <a:r>
-              <a:t>Chapter 8 - Yu Qi She Ye Ning Jian (与其奢也宁俭)</a:t>
-            </a:r>
-          </a:p>
-        </p:txBody>
-      </p:sp>
-      <p:sp>
-        <p:nvSpPr>
-          <p:cNvPr id="4" name="Rounded Rectangle 3"/>
-          <p:cNvSpPr/>
-          <p:nvPr/>
-        </p:nvSpPr>
-        <p:spPr>
-          <a:xfrm>
-            <a:off x="457200" y="1371600"/>
-            <a:ext cx="8229600" cy="3474720"/>
-          </a:xfrm>
-          <a:prstGeom prst="roundRect">
-            <a:avLst/>
-          </a:prstGeom>
-          <a:solidFill>
-            <a:srgbClr val="F5F5F0"/>
-          </a:solidFill>
-        </p:spPr>
-        <p:style>
-          <a:lnRef idx="1">
-            <a:schemeClr val="accent1"/>
-          </a:lnRef>
-          <a:fillRef idx="3">
-            <a:schemeClr val="accent1"/>
-          </a:fillRef>
-          <a:effectRef idx="2">
-            <a:schemeClr val="accent1"/>
-          </a:effectRef>
-          <a:fontRef idx="minor">
-            <a:schemeClr val="lt1"/>
-          </a:fontRef>
-        </p:style>
-        <p:txBody>
-          <a:bodyPr rtlCol="0" anchor="ctr" wrap="square"/>
-          <a:lstStyle/>
-          <a:p>
-            <a:pPr algn="ctr">
-              <a:defRPr sz="1800" b="1">
-                <a:solidFill>
-                  <a:srgbClr val="1E3C72"/>
-                </a:solidFill>
-              </a:defRPr>
-            </a:pPr>
-            <a:r>
-              <a:t>[Original Text]</a:t>
-            </a:r>
-          </a:p>
-          <a:p>
-            <a:pPr>
-              <a:spcBef>
-                <a:spcPts val="400"/>
-              </a:spcBef>
-              <a:defRPr sz="2200">
-                <a:solidFill>
-                  <a:srgbClr val="333333"/>
-                </a:solidFill>
-              </a:defRPr>
-            </a:pPr>
-            <a:r>
-              <a:t>Lin Fang Wen Li Zhi Ben.</a:t>
-            </a:r>
-          </a:p>
-          <a:p>
-            <a:pPr>
-              <a:spcBef>
-                <a:spcPts val="400"/>
-              </a:spcBef>
-              <a:defRPr sz="2200">
-                <a:solidFill>
-                  <a:srgbClr val="333333"/>
-                </a:solidFill>
-              </a:defRPr>
-            </a:pPr>
-            <a:r>
-              <a:t>Zi Yue: 'Da Zai Wen!</a:t>
-            </a:r>
-          </a:p>
-          <a:p>
-            <a:pPr>
-              <a:spcBef>
-                <a:spcPts val="400"/>
-              </a:spcBef>
-              <a:defRPr sz="2200">
-                <a:solidFill>
-                  <a:srgbClr val="333333"/>
-                </a:solidFill>
-              </a:defRPr>
-            </a:pPr>
-            <a:r>
-              <a:t>Li, Yu Qi She Ye, Ning Jian;</a:t>
-            </a:r>
-          </a:p>
-          <a:p>
-            <a:pPr>
-              <a:spcBef>
-                <a:spcPts val="400"/>
-              </a:spcBef>
-              <a:defRPr sz="2200">
-                <a:solidFill>
-                  <a:srgbClr val="333333"/>
-                </a:solidFill>
-              </a:defRPr>
-            </a:pPr>
-            <a:r>
-              <a:t>Sang, Yu Qi Yi Ye, Ning Qi.'"</a:t>
-            </a:r>
-          </a:p>
-        </p:txBody>
-      </p:sp>
-      <p:sp>
-        <p:nvSpPr>
-          <p:cNvPr id="5" name="Rounded Rectangle 4"/>
-          <p:cNvSpPr/>
-          <p:nvPr/>
-        </p:nvSpPr>
-        <p:spPr>
-          <a:xfrm>
-            <a:off x="457200" y="4937760"/>
-            <a:ext cx="8229600" cy="1005840"/>
-          </a:xfrm>
-          <a:prstGeom prst="roundRect">
-            <a:avLst/>
-          </a:prstGeom>
-          <a:solidFill>
-            <a:srgbClr val="4682B4"/>
-          </a:solidFill>
-        </p:spPr>
-        <p:style>
-          <a:lnRef idx="1">
-            <a:schemeClr val="accent1"/>
-          </a:lnRef>
-          <a:fillRef idx="3">
-            <a:schemeClr val="accent1"/>
-          </a:fillRef>
-          <a:effectRef idx="2">
-            <a:schemeClr val="accent1"/>
-          </a:effectRef>
-          <a:fontRef idx="minor">
-            <a:schemeClr val="lt1"/>
-          </a:fontRef>
-        </p:style>
-        <p:txBody>
-          <a:bodyPr rtlCol="0" anchor="ctr" wrap="square"/>
-          <a:lstStyle/>
-          <a:p>
-            <a:pPr algn="ctr">
-              <a:defRPr sz="1600">
-                <a:solidFill>
-                  <a:srgbClr val="FFFFFF"/>
-                </a:solidFill>
-              </a:defRPr>
-            </a:pPr>
-            <a:r>
-              <a:t>[Translation] 林放问礼的本质。孔子说：这个问题意义重大！就一般礼仪来说，与其奢侈浪费，宁可节俭朴素；就丧礼来说，与其仪式完备，宁可内心悲哀。</a:t>
-            </a:r>
-          </a:p>
-          <a:p>
-            <a:pPr>
-              <a:defRPr sz="1500" i="1">
-                <a:solidFill>
-                  <a:srgbClr val="DCDCFF"/>
-                </a:solidFill>
-              </a:defRPr>
-            </a:pPr>
-            <a:r>
-              <a:t>[EN] Lin Fang asked about the essence of ritual. Confucius said: 'What a great question! For ceremonies, plainness is better than extravagance; for funerals, grief is more important than elaborate ritual.'</a:t>
-            </a:r>
-          </a:p>
-        </p:txBody>
-      </p:sp>
-      <p:sp>
-        <p:nvSpPr>
-          <p:cNvPr id="6" name="TextBox 5"/>
-          <p:cNvSpPr txBox="1"/>
-          <p:nvPr/>
-        </p:nvSpPr>
-        <p:spPr>
-          <a:xfrm>
-            <a:off x="8229600" y="6583680"/>
-            <a:ext cx="731520" cy="274320"/>
-          </a:xfrm>
-          <a:prstGeom prst="rect">
-            <a:avLst/>
-          </a:prstGeom>
-          <a:noFill/>
-        </p:spPr>
-        <p:txBody>
-          <a:bodyPr wrap="none">
-            <a:spAutoFit/>
-          </a:bodyPr>
-          <a:lstStyle/>
-          <a:p>
-            <a:pPr algn="r">
-              <a:defRPr sz="1200">
-                <a:solidFill>
-                  <a:srgbClr val="969696"/>
-                </a:solidFill>
-              </a:defRPr>
-            </a:pPr>
-            <a:r>
-              <a:t>5/14</a:t>
-            </a:r>
-          </a:p>
-        </p:txBody>
-      </p:sp>
-    </p:spTree>
-  </p:cSld>
-  <p:clrMapOvr>
-    <a:masterClrMapping/>
-  </p:clrMapOvr>
-</p:sld>
-</file>
-
-<file path=ppt/slides/slide6.xml><?xml version="1.0" encoding="utf-8"?>
-<p:sld xmlns:a="http://schemas.openxmlformats.org/drawingml/2006/main" xmlns:p="http://schemas.openxmlformats.org/presentationml/2006/main" xmlns:r="http://schemas.openxmlformats.org/officeDocument/2006/relationships">
-  <p:cSld>
-    <p:spTree>
-      <p:nvGrpSpPr>
-        <p:cNvPr id="1" name=""/>
-        <p:cNvGrpSpPr/>
-        <p:nvPr/>
-      </p:nvGrpSpPr>
-      <p:grpSpPr/>
-      <p:sp>
-        <p:nvSpPr>
-          <p:cNvPr id="2" name="Rectangle 1"/>
-          <p:cNvSpPr/>
-          <p:nvPr/>
-        </p:nvSpPr>
-        <p:spPr>
-          <a:xfrm>
-            <a:off x="0" y="0"/>
-            <a:ext cx="9144000" cy="1188720"/>
-          </a:xfrm>
-          <a:prstGeom prst="rect">
-            <a:avLst/>
-          </a:prstGeom>
-          <a:solidFill>
-            <a:srgbClr val="1E3C72"/>
-          </a:solidFill>
-          <a:ln>
-            <a:noFill/>
-          </a:ln>
-        </p:spPr>
-        <p:style>
-          <a:lnRef idx="1">
-            <a:schemeClr val="accent1"/>
-          </a:lnRef>
-          <a:fillRef idx="3">
-            <a:schemeClr val="accent1"/>
-          </a:fillRef>
-          <a:effectRef idx="2">
-            <a:schemeClr val="accent1"/>
-          </a:effectRef>
-          <a:fontRef idx="minor">
-            <a:schemeClr val="lt1"/>
-          </a:fontRef>
-        </p:style>
-        <p:txBody>
-          <a:bodyPr rtlCol="0" anchor="ctr"/>
-          <a:lstStyle/>
-          <a:p>
-            <a:pPr algn="ctr"/>
-          </a:p>
-        </p:txBody>
-      </p:sp>
-      <p:sp>
-        <p:nvSpPr>
-          <p:cNvPr id="3" name="TextBox 2"/>
-          <p:cNvSpPr txBox="1"/>
-          <p:nvPr/>
-        </p:nvSpPr>
-        <p:spPr>
-          <a:xfrm>
-            <a:off x="457200" y="228600"/>
-            <a:ext cx="8229600" cy="731520"/>
-          </a:xfrm>
-          <a:prstGeom prst="rect">
-            <a:avLst/>
-          </a:prstGeom>
-          <a:noFill/>
-        </p:spPr>
-        <p:txBody>
-          <a:bodyPr wrap="none">
-            <a:spAutoFit/>
-          </a:bodyPr>
-          <a:lstStyle/>
-          <a:p>
-            <a:pPr>
-              <a:defRPr sz="3400" b="1">
-                <a:solidFill>
-                  <a:srgbClr val="FFFFFF"/>
-                </a:solidFill>
-              </a:defRPr>
-            </a:pPr>
-            <a:r>
-              <a:t>Chapter 8 - Yu Qi She Ye Ning Jian (与其奢也宁俭) [Annotations]</a:t>
-            </a:r>
-          </a:p>
-        </p:txBody>
-      </p:sp>
-      <p:sp>
-        <p:nvSpPr>
-          <p:cNvPr id="4" name="Rounded Rectangle 3"/>
-          <p:cNvSpPr/>
-          <p:nvPr/>
-        </p:nvSpPr>
-        <p:spPr>
-          <a:xfrm>
-            <a:off x="457200" y="1371600"/>
-            <a:ext cx="8229600" cy="3840480"/>
-          </a:xfrm>
-          <a:prstGeom prst="roundRect">
-            <a:avLst/>
-          </a:prstGeom>
-          <a:solidFill>
-            <a:srgbClr val="F5F5F0"/>
-          </a:solidFill>
-        </p:spPr>
-        <p:style>
-          <a:lnRef idx="1">
-            <a:schemeClr val="accent1"/>
-          </a:lnRef>
-          <a:fillRef idx="3">
-            <a:schemeClr val="accent1"/>
-          </a:fillRef>
-          <a:effectRef idx="2">
-            <a:schemeClr val="accent1"/>
-          </a:effectRef>
-          <a:fontRef idx="minor">
-            <a:schemeClr val="lt1"/>
-          </a:fontRef>
-        </p:style>
-        <p:txBody>
-          <a:bodyPr rtlCol="0" anchor="ctr" wrap="square"/>
-          <a:lstStyle/>
-          <a:p>
-            <a:pPr algn="ctr">
-              <a:defRPr sz="1800" b="1">
-                <a:solidFill>
-                  <a:srgbClr val="1E3C72"/>
-                </a:solidFill>
-              </a:defRPr>
-            </a:pPr>
-            <a:r>
-              <a:t>[Annotations]</a:t>
-            </a:r>
-          </a:p>
-          <a:p>
-            <a:pPr>
-              <a:spcBef>
-                <a:spcPts val="500"/>
-              </a:spcBef>
-              <a:defRPr sz="1700">
-                <a:solidFill>
-                  <a:srgbClr val="333333"/>
-                </a:solidFill>
-              </a:defRPr>
-            </a:pPr>
-            <a:r>
-              <a:t>* Lin Fang (林放): Lu citizen, disciple of Confucius</a:t>
-            </a:r>
-          </a:p>
-          <a:p>
-            <a:pPr>
-              <a:spcBef>
-                <a:spcPts val="500"/>
-              </a:spcBef>
-              <a:defRPr sz="1700">
-                <a:solidFill>
-                  <a:srgbClr val="333333"/>
-                </a:solidFill>
-              </a:defRPr>
-            </a:pPr>
-            <a:r>
-              <a:t>* Li Zhi Ben (礼之本): The essence/fundament of ritual</a:t>
-            </a:r>
-          </a:p>
-          <a:p>
-            <a:pPr>
-              <a:spcBef>
-                <a:spcPts val="500"/>
-              </a:spcBef>
-              <a:defRPr sz="1700">
-                <a:solidFill>
-                  <a:srgbClr val="333333"/>
-                </a:solidFill>
-              </a:defRPr>
-            </a:pPr>
-            <a:r>
-              <a:t>* Yi (易): Perfectly arranged, elaborate ritual</a:t>
-            </a:r>
-          </a:p>
-          <a:p>
-            <a:pPr>
-              <a:spcBef>
-                <a:spcPts val="500"/>
-              </a:spcBef>
-              <a:defRPr sz="1700">
-                <a:solidFill>
-                  <a:srgbClr val="333333"/>
-                </a:solidFill>
-              </a:defRPr>
-            </a:pPr>
-            <a:r>
-              <a:t>* Qi (戚): Inner grief</a:t>
-            </a:r>
-          </a:p>
-        </p:txBody>
-      </p:sp>
-      <p:sp>
-        <p:nvSpPr>
-          <p:cNvPr id="5" name="TextBox 4"/>
-          <p:cNvSpPr txBox="1"/>
-          <p:nvPr/>
-        </p:nvSpPr>
-        <p:spPr>
-          <a:xfrm>
-            <a:off x="8229600" y="6583680"/>
-            <a:ext cx="731520" cy="274320"/>
-          </a:xfrm>
-          <a:prstGeom prst="rect">
-            <a:avLst/>
-          </a:prstGeom>
-          <a:noFill/>
-        </p:spPr>
-        <p:txBody>
-          <a:bodyPr wrap="none">
-            <a:spAutoFit/>
-          </a:bodyPr>
-          <a:lstStyle/>
-          <a:p>
-            <a:pPr algn="r">
-              <a:defRPr sz="1200">
-                <a:solidFill>
-                  <a:srgbClr val="969696"/>
-                </a:solidFill>
-              </a:defRPr>
-            </a:pPr>
-            <a:r>
-              <a:t>6/14</a:t>
-            </a:r>
-          </a:p>
-        </p:txBody>
-      </p:sp>
-    </p:spTree>
-  </p:cSld>
-  <p:clrMapOvr>
-    <a:masterClrMapping/>
-  </p:clrMapOvr>
-</p:sld>
-</file>
-
-<file path=ppt/slides/slide7.xml><?xml version="1.0" encoding="utf-8"?>
-<p:sld xmlns:a="http://schemas.openxmlformats.org/drawingml/2006/main" xmlns:p="http://schemas.openxmlformats.org/presentationml/2006/main" xmlns:r="http://schemas.openxmlformats.org/officeDocument/2006/relationships">
-  <p:cSld>
-    <p:spTree>
-      <p:nvGrpSpPr>
-        <p:cNvPr id="1" name=""/>
-        <p:cNvGrpSpPr/>
-        <p:nvPr/>
-      </p:nvGrpSpPr>
-      <p:grpSpPr/>
-      <p:sp>
-        <p:nvSpPr>
-          <p:cNvPr id="2" name="Rectangle 1"/>
-          <p:cNvSpPr/>
-          <p:nvPr/>
-        </p:nvSpPr>
-        <p:spPr>
-          <a:xfrm>
-            <a:off x="0" y="0"/>
-            <a:ext cx="9144000" cy="1188720"/>
-          </a:xfrm>
-          <a:prstGeom prst="rect">
-            <a:avLst/>
-          </a:prstGeom>
-          <a:solidFill>
-            <a:srgbClr val="1E3C72"/>
-          </a:solidFill>
-          <a:ln>
-            <a:noFill/>
-          </a:ln>
-        </p:spPr>
-        <p:style>
-          <a:lnRef idx="1">
-            <a:schemeClr val="accent1"/>
-          </a:lnRef>
-          <a:fillRef idx="3">
-            <a:schemeClr val="accent1"/>
-          </a:fillRef>
-          <a:effectRef idx="2">
-            <a:schemeClr val="accent1"/>
-          </a:effectRef>
-          <a:fontRef idx="minor">
-            <a:schemeClr val="lt1"/>
-          </a:fontRef>
-        </p:style>
-        <p:txBody>
-          <a:bodyPr rtlCol="0" anchor="ctr"/>
-          <a:lstStyle/>
-          <a:p>
-            <a:pPr algn="ctr"/>
-          </a:p>
-        </p:txBody>
-      </p:sp>
-      <p:sp>
-        <p:nvSpPr>
-          <p:cNvPr id="3" name="TextBox 2"/>
-          <p:cNvSpPr txBox="1"/>
-          <p:nvPr/>
-        </p:nvSpPr>
-        <p:spPr>
-          <a:xfrm>
-            <a:off x="457200" y="228600"/>
-            <a:ext cx="8229600" cy="731520"/>
-          </a:xfrm>
-          <a:prstGeom prst="rect">
-            <a:avLst/>
-          </a:prstGeom>
-          <a:noFill/>
-        </p:spPr>
-        <p:txBody>
-          <a:bodyPr wrap="none">
-            <a:spAutoFit/>
-          </a:bodyPr>
-          <a:lstStyle/>
-          <a:p>
-            <a:pPr>
-              <a:defRPr sz="3400" b="1">
-                <a:solidFill>
-                  <a:srgbClr val="FFFFFF"/>
-                </a:solidFill>
-              </a:defRPr>
-            </a:pPr>
-            <a:r>
-              <a:t>Chapter 8 - Core Ideas</a:t>
-            </a:r>
-          </a:p>
-        </p:txBody>
-      </p:sp>
-      <p:sp>
-        <p:nvSpPr>
-          <p:cNvPr id="4" name="Rounded Rectangle 3"/>
-          <p:cNvSpPr/>
-          <p:nvPr/>
-        </p:nvSpPr>
-        <p:spPr>
-          <a:xfrm>
-            <a:off x="457200" y="1371600"/>
-            <a:ext cx="8229600" cy="1371600"/>
-          </a:xfrm>
-          <a:prstGeom prst="roundRect">
-            <a:avLst/>
-          </a:prstGeom>
-          <a:solidFill>
-            <a:srgbClr val="4682B4"/>
-          </a:solidFill>
-        </p:spPr>
-        <p:style>
-          <a:lnRef idx="1">
-            <a:schemeClr val="accent1"/>
-          </a:lnRef>
-          <a:fillRef idx="3">
-            <a:schemeClr val="accent1"/>
-          </a:fillRef>
-          <a:effectRef idx="2">
-            <a:schemeClr val="accent1"/>
-          </a:effectRef>
-          <a:fontRef idx="minor">
-            <a:schemeClr val="lt1"/>
-          </a:fontRef>
-        </p:style>
-        <p:txBody>
-          <a:bodyPr rtlCol="0" anchor="ctr" wrap="square"/>
-          <a:lstStyle/>
-          <a:p>
-            <a:pPr algn="ctr">
-              <a:defRPr sz="2000" b="1">
-                <a:solidFill>
-                  <a:srgbClr val="FFFFFF"/>
-                </a:solidFill>
-              </a:defRPr>
-            </a:pPr>
-            <a:r>
-              <a:t>Core Concept</a:t>
-            </a:r>
-          </a:p>
-          <a:p>
-            <a:pPr>
-              <a:defRPr sz="1700">
-                <a:solidFill>
-                  <a:srgbClr val="E6E6E6"/>
-                </a:solidFill>
-              </a:defRPr>
-            </a:pPr>
-            <a:r>
-              <a:t>礼，与其奢也，宁俭: This phrase has broad applications in modern life. At weddings, funer...</a:t>
-            </a:r>
-          </a:p>
-        </p:txBody>
-      </p:sp>
-      <p:sp>
-        <p:nvSpPr>
-          <p:cNvPr id="5" name="TextBox 4"/>
-          <p:cNvSpPr txBox="1"/>
-          <p:nvPr/>
-        </p:nvSpPr>
-        <p:spPr>
-          <a:xfrm>
-            <a:off x="457200" y="2926080"/>
-            <a:ext cx="8229600" cy="1097280"/>
-          </a:xfrm>
-          <a:prstGeom prst="rect">
-            <a:avLst/>
-          </a:prstGeom>
-          <a:noFill/>
-        </p:spPr>
-        <p:txBody>
-          <a:bodyPr wrap="square">
-            <a:spAutoFit/>
-          </a:bodyPr>
-          <a:lstStyle/>
-          <a:p>
-            <a:pPr>
-              <a:defRPr sz="1900" b="1">
-                <a:solidFill>
-                  <a:srgbClr val="1E3C72"/>
-                </a:solidFill>
-              </a:defRPr>
-            </a:pPr>
-            <a:r>
-              <a:t>1. 礼的本质</a:t>
-            </a:r>
-          </a:p>
-          <a:p>
-            <a:pPr>
-              <a:defRPr sz="1600">
-                <a:solidFill>
-                  <a:srgbClr val="333333"/>
-                </a:solidFill>
-              </a:defRPr>
-            </a:pPr>
-            <a:r>
-              <a:t>礼的根本不在形式，而在于内心——形式只是内心情感的外在表达。</a:t>
-            </a:r>
-          </a:p>
-        </p:txBody>
-      </p:sp>
-      <p:sp>
-        <p:nvSpPr>
-          <p:cNvPr id="6" name="TextBox 5"/>
-          <p:cNvSpPr txBox="1"/>
-          <p:nvPr/>
-        </p:nvSpPr>
-        <p:spPr>
-          <a:xfrm>
-            <a:off x="457200" y="4023360"/>
-            <a:ext cx="8229600" cy="1097280"/>
-          </a:xfrm>
-          <a:prstGeom prst="rect">
-            <a:avLst/>
-          </a:prstGeom>
-          <a:noFill/>
-        </p:spPr>
-        <p:txBody>
-          <a:bodyPr wrap="square">
-            <a:spAutoFit/>
-          </a:bodyPr>
-          <a:lstStyle/>
-          <a:p>
-            <a:pPr>
-              <a:defRPr sz="1900" b="1">
-                <a:solidFill>
-                  <a:srgbClr val="1E3C72"/>
-                </a:solidFill>
-              </a:defRPr>
-            </a:pPr>
-            <a:r>
-              <a:t>2. 宁俭勿奢</a:t>
-            </a:r>
-          </a:p>
-          <a:p>
-            <a:pPr>
-              <a:defRPr sz="1600">
-                <a:solidFill>
-                  <a:srgbClr val="333333"/>
-                </a:solidFill>
-              </a:defRPr>
-            </a:pPr>
-            <a:r>
-              <a:t>宁可简朴也不要奢侈——礼的精神在于真诚，不在于排场。</a:t>
-            </a:r>
-          </a:p>
-        </p:txBody>
-      </p:sp>
-      <p:sp>
-        <p:nvSpPr>
-          <p:cNvPr id="7" name="TextBox 6"/>
-          <p:cNvSpPr txBox="1"/>
-          <p:nvPr/>
-        </p:nvSpPr>
-        <p:spPr>
-          <a:xfrm>
-            <a:off x="457200" y="5120640"/>
-            <a:ext cx="8229600" cy="1097280"/>
-          </a:xfrm>
-          <a:prstGeom prst="rect">
-            <a:avLst/>
-          </a:prstGeom>
-          <a:noFill/>
-        </p:spPr>
-        <p:txBody>
-          <a:bodyPr wrap="square">
-            <a:spAutoFit/>
-          </a:bodyPr>
-          <a:lstStyle/>
-          <a:p>
-            <a:pPr>
-              <a:defRPr sz="1900" b="1">
-                <a:solidFill>
-                  <a:srgbClr val="1E3C72"/>
-                </a:solidFill>
-              </a:defRPr>
-            </a:pPr>
-            <a:r>
-              <a:t>3. 丧礼重情</a:t>
-            </a:r>
-          </a:p>
-          <a:p>
-            <a:pPr>
-              <a:defRPr sz="1600">
-                <a:solidFill>
-                  <a:srgbClr val="333333"/>
-                </a:solidFill>
-              </a:defRPr>
-            </a:pPr>
-            <a:r>
-              <a:t>丧礼最重要的是内心悲哀，仪式再完美如果内心没有悲伤，也是徒有其表。</a:t>
-            </a:r>
-          </a:p>
-        </p:txBody>
-      </p:sp>
-      <p:sp>
-        <p:nvSpPr>
-          <p:cNvPr id="8" name="TextBox 7"/>
-          <p:cNvSpPr txBox="1"/>
-          <p:nvPr/>
-        </p:nvSpPr>
-        <p:spPr>
-          <a:xfrm>
-            <a:off x="8229600" y="6583680"/>
-            <a:ext cx="731520" cy="274320"/>
-          </a:xfrm>
-          <a:prstGeom prst="rect">
-            <a:avLst/>
-          </a:prstGeom>
-          <a:noFill/>
-        </p:spPr>
-        <p:txBody>
-          <a:bodyPr wrap="none">
-            <a:spAutoFit/>
-          </a:bodyPr>
-          <a:lstStyle/>
-          <a:p>
-            <a:pPr algn="r">
-              <a:defRPr sz="1200">
-                <a:solidFill>
-                  <a:srgbClr val="969696"/>
-                </a:solidFill>
-              </a:defRPr>
-            </a:pPr>
-            <a:r>
-              <a:t>7/14</a:t>
-            </a:r>
-          </a:p>
-        </p:txBody>
-      </p:sp>
-    </p:spTree>
-  </p:cSld>
-  <p:clrMapOvr>
-    <a:masterClrMapping/>
-  </p:clrMapOvr>
-</p:sld>
-</file>
-
-<file path=ppt/slides/slide8.xml><?xml version="1.0" encoding="utf-8"?>
-<p:sld xmlns:a="http://schemas.openxmlformats.org/drawingml/2006/main" xmlns:p="http://schemas.openxmlformats.org/presentationml/2006/main" xmlns:r="http://schemas.openxmlformats.org/officeDocument/2006/relationships">
-  <p:cSld>
-    <p:spTree>
-      <p:nvGrpSpPr>
-        <p:cNvPr id="1" name=""/>
-        <p:cNvGrpSpPr/>
-        <p:nvPr/>
-      </p:nvGrpSpPr>
-      <p:grpSpPr/>
-      <p:sp>
-        <p:nvSpPr>
-          <p:cNvPr id="2" name="Rectangle 1"/>
-          <p:cNvSpPr/>
-          <p:nvPr/>
-        </p:nvSpPr>
-        <p:spPr>
-          <a:xfrm>
-            <a:off x="0" y="0"/>
-            <a:ext cx="9144000" cy="1188720"/>
-          </a:xfrm>
-          <a:prstGeom prst="rect">
-            <a:avLst/>
-          </a:prstGeom>
-          <a:solidFill>
-            <a:srgbClr val="1E3C72"/>
-          </a:solidFill>
-          <a:ln>
-            <a:noFill/>
-          </a:ln>
-        </p:spPr>
-        <p:style>
-          <a:lnRef idx="1">
-            <a:schemeClr val="accent1"/>
-          </a:lnRef>
-          <a:fillRef idx="3">
-            <a:schemeClr val="accent1"/>
-          </a:fillRef>
-          <a:effectRef idx="2">
-            <a:schemeClr val="accent1"/>
-          </a:effectRef>
-          <a:fontRef idx="minor">
-            <a:schemeClr val="lt1"/>
-          </a:fontRef>
-        </p:style>
-        <p:txBody>
-          <a:bodyPr rtlCol="0" anchor="ctr"/>
-          <a:lstStyle/>
-          <a:p>
-            <a:pPr algn="ctr"/>
-          </a:p>
-        </p:txBody>
-      </p:sp>
-      <p:sp>
-        <p:nvSpPr>
-          <p:cNvPr id="3" name="TextBox 2"/>
-          <p:cNvSpPr txBox="1"/>
-          <p:nvPr/>
-        </p:nvSpPr>
-        <p:spPr>
-          <a:xfrm>
-            <a:off x="457200" y="228600"/>
-            <a:ext cx="8229600" cy="731520"/>
-          </a:xfrm>
-          <a:prstGeom prst="rect">
-            <a:avLst/>
-          </a:prstGeom>
-          <a:noFill/>
-        </p:spPr>
-        <p:txBody>
-          <a:bodyPr wrap="none">
-            <a:spAutoFit/>
-          </a:bodyPr>
-          <a:lstStyle/>
-          <a:p>
-            <a:pPr>
-              <a:defRPr sz="3400" b="1">
-                <a:solidFill>
-                  <a:srgbClr val="FFFFFF"/>
-                </a:solidFill>
-              </a:defRPr>
-            </a:pPr>
-            <a:r>
-              <a:t>Chapter 9 - Gao Shuo Xi Yang (告朔饩羊)</a:t>
-            </a:r>
-          </a:p>
-        </p:txBody>
-      </p:sp>
-      <p:sp>
-        <p:nvSpPr>
-          <p:cNvPr id="4" name="Rounded Rectangle 3"/>
-          <p:cNvSpPr/>
-          <p:nvPr/>
-        </p:nvSpPr>
-        <p:spPr>
-          <a:xfrm>
-            <a:off x="457200" y="1371600"/>
-            <a:ext cx="8229600" cy="3474720"/>
-          </a:xfrm>
-          <a:prstGeom prst="roundRect">
-            <a:avLst/>
-          </a:prstGeom>
-          <a:solidFill>
-            <a:srgbClr val="F5F5F0"/>
-          </a:solidFill>
-        </p:spPr>
-        <p:style>
-          <a:lnRef idx="1">
-            <a:schemeClr val="accent1"/>
-          </a:lnRef>
-          <a:fillRef idx="3">
-            <a:schemeClr val="accent1"/>
-          </a:fillRef>
-          <a:effectRef idx="2">
-            <a:schemeClr val="accent1"/>
-          </a:effectRef>
-          <a:fontRef idx="minor">
-            <a:schemeClr val="lt1"/>
-          </a:fontRef>
-        </p:style>
-        <p:txBody>
-          <a:bodyPr rtlCol="0" anchor="ctr" wrap="square"/>
-          <a:lstStyle/>
-          <a:p>
-            <a:pPr algn="ctr">
-              <a:defRPr sz="1800" b="1">
-                <a:solidFill>
-                  <a:srgbClr val="1E3C72"/>
-                </a:solidFill>
-              </a:defRPr>
-            </a:pPr>
-            <a:r>
-              <a:t>[Original Text]</a:t>
-            </a:r>
-          </a:p>
-          <a:p>
-            <a:pPr>
-              <a:spcBef>
-                <a:spcPts val="400"/>
-              </a:spcBef>
-              <a:defRPr sz="2200">
-                <a:solidFill>
-                  <a:srgbClr val="333333"/>
-                </a:solidFill>
-              </a:defRPr>
-            </a:pPr>
-            <a:r>
-              <a:t>Zi Gong Yu Qu Gao Shuo Zhi Xi Yang.</a:t>
-            </a:r>
-          </a:p>
-          <a:p>
-            <a:pPr>
-              <a:spcBef>
-                <a:spcPts val="400"/>
-              </a:spcBef>
-              <a:defRPr sz="2200">
-                <a:solidFill>
-                  <a:srgbClr val="333333"/>
-                </a:solidFill>
-              </a:defRPr>
-            </a:pPr>
-            <a:r>
-              <a:t>Zi Yue: 'Ci Ye! Er Ai Qi Yang,</a:t>
-            </a:r>
-          </a:p>
-          <a:p>
-            <a:pPr>
-              <a:spcBef>
-                <a:spcPts val="400"/>
-              </a:spcBef>
-              <a:defRPr sz="2200">
-                <a:solidFill>
-                  <a:srgbClr val="333333"/>
-                </a:solidFill>
-              </a:defRPr>
-            </a:pPr>
-            <a:r>
-              <a:t>Wo Ai Qi Li.'"</a:t>
-            </a:r>
-          </a:p>
-        </p:txBody>
-      </p:sp>
-      <p:sp>
-        <p:nvSpPr>
-          <p:cNvPr id="5" name="Rounded Rectangle 4"/>
-          <p:cNvSpPr/>
-          <p:nvPr/>
-        </p:nvSpPr>
-        <p:spPr>
-          <a:xfrm>
-            <a:off x="457200" y="4937760"/>
-            <a:ext cx="8229600" cy="1005840"/>
-          </a:xfrm>
-          <a:prstGeom prst="roundRect">
-            <a:avLst/>
-          </a:prstGeom>
-          <a:solidFill>
-            <a:srgbClr val="4682B4"/>
-          </a:solidFill>
-        </p:spPr>
-        <p:style>
-          <a:lnRef idx="1">
-            <a:schemeClr val="accent1"/>
-          </a:lnRef>
-          <a:fillRef idx="3">
-            <a:schemeClr val="accent1"/>
-          </a:fillRef>
-          <a:effectRef idx="2">
-            <a:schemeClr val="accent1"/>
-          </a:effectRef>
-          <a:fontRef idx="minor">
-            <a:schemeClr val="lt1"/>
-          </a:fontRef>
-        </p:style>
-        <p:txBody>
-          <a:bodyPr rtlCol="0" anchor="ctr" wrap="square"/>
-          <a:lstStyle/>
-          <a:p>
-            <a:pPr algn="ctr">
-              <a:defRPr sz="1600">
-                <a:solidFill>
-                  <a:srgbClr val="FFFFFF"/>
-                </a:solidFill>
-              </a:defRPr>
-            </a:pPr>
-            <a:r>
-              <a:t>[Translation] 子贡想要去掉每月初一告祭祖庙用的活羊。孔子说：赐啊！你舍不得那只羊，我舍不得那种礼。</a:t>
-            </a:r>
-          </a:p>
-          <a:p>
-            <a:pPr>
-              <a:defRPr sz="1500" i="1">
-                <a:solidFill>
-                  <a:srgbClr val="DCDCFF"/>
-                </a:solidFill>
-              </a:defRPr>
-            </a:pPr>
-            <a:r>
-              <a:t>[EN] Zigong wished to discontinue the sacrificial sheep for the monthly sacrificial rite. Confucius said: 'Si, you grudge the sheep, but I grudge the rite.'</a:t>
-            </a:r>
-          </a:p>
-        </p:txBody>
-      </p:sp>
-      <p:sp>
-        <p:nvSpPr>
-          <p:cNvPr id="6" name="TextBox 5"/>
-          <p:cNvSpPr txBox="1"/>
-          <p:nvPr/>
-        </p:nvSpPr>
-        <p:spPr>
-          <a:xfrm>
-            <a:off x="8229600" y="6583680"/>
-            <a:ext cx="731520" cy="274320"/>
-          </a:xfrm>
-          <a:prstGeom prst="rect">
-            <a:avLst/>
-          </a:prstGeom>
-          <a:noFill/>
-        </p:spPr>
-        <p:txBody>
-          <a:bodyPr wrap="none">
-            <a:spAutoFit/>
-          </a:bodyPr>
-          <a:lstStyle/>
-          <a:p>
-            <a:pPr algn="r">
-              <a:defRPr sz="1200">
-                <a:solidFill>
-                  <a:srgbClr val="969696"/>
-                </a:solidFill>
-              </a:defRPr>
-            </a:pPr>
-            <a:r>
-              <a:t>8/14</a:t>
-            </a:r>
-          </a:p>
-        </p:txBody>
-      </p:sp>
-    </p:spTree>
-  </p:cSld>
-  <p:clrMapOvr>
-    <a:masterClrMapping/>
-  </p:clrMapOvr>
-</p:sld>
-</file>
-
-<file path=ppt/slides/slide9.xml><?xml version="1.0" encoding="utf-8"?>
-<p:sld xmlns:a="http://schemas.openxmlformats.org/drawingml/2006/main" xmlns:p="http://schemas.openxmlformats.org/presentationml/2006/main" xmlns:r="http://schemas.openxmlformats.org/officeDocument/2006/relationships">
-  <p:cSld>
-    <p:spTree>
-      <p:nvGrpSpPr>
-        <p:cNvPr id="1" name=""/>
-        <p:cNvGrpSpPr/>
-        <p:nvPr/>
-      </p:nvGrpSpPr>
-      <p:grpSpPr/>
-      <p:sp>
-        <p:nvSpPr>
-          <p:cNvPr id="2" name="Rectangle 1"/>
-          <p:cNvSpPr/>
-          <p:nvPr/>
-        </p:nvSpPr>
-        <p:spPr>
-          <a:xfrm>
-            <a:off x="0" y="0"/>
-            <a:ext cx="9144000" cy="1188720"/>
-          </a:xfrm>
-          <a:prstGeom prst="rect">
-            <a:avLst/>
-          </a:prstGeom>
-          <a:solidFill>
-            <a:srgbClr val="1E3C72"/>
-          </a:solidFill>
-          <a:ln>
-            <a:noFill/>
-          </a:ln>
-        </p:spPr>
-        <p:style>
-          <a:lnRef idx="1">
-            <a:schemeClr val="accent1"/>
-          </a:lnRef>
-          <a:fillRef idx="3">
-            <a:schemeClr val="accent1"/>
-          </a:fillRef>
-          <a:effectRef idx="2">
-            <a:schemeClr val="accent1"/>
-          </a:effectRef>
-          <a:fontRef idx="minor">
-            <a:schemeClr val="lt1"/>
-          </a:fontRef>
-        </p:style>
-        <p:txBody>
-          <a:bodyPr rtlCol="0" anchor="ctr"/>
-          <a:lstStyle/>
-          <a:p>
-            <a:pPr algn="ctr"/>
-          </a:p>
-        </p:txBody>
-      </p:sp>
-      <p:sp>
-        <p:nvSpPr>
-          <p:cNvPr id="3" name="TextBox 2"/>
-          <p:cNvSpPr txBox="1"/>
-          <p:nvPr/>
-        </p:nvSpPr>
-        <p:spPr>
-          <a:xfrm>
-            <a:off x="457200" y="228600"/>
-            <a:ext cx="8229600" cy="731520"/>
-          </a:xfrm>
-          <a:prstGeom prst="rect">
-            <a:avLst/>
-          </a:prstGeom>
-          <a:noFill/>
-        </p:spPr>
-        <p:txBody>
-          <a:bodyPr wrap="none">
-            <a:spAutoFit/>
-          </a:bodyPr>
-          <a:lstStyle/>
-          <a:p>
-            <a:pPr>
-              <a:defRPr sz="3400" b="1">
-                <a:solidFill>
-                  <a:srgbClr val="FFFFFF"/>
-                </a:solidFill>
-              </a:defRPr>
-            </a:pPr>
-            <a:r>
-              <a:t>Chapter 9 - Gao Shuo Xi Yang (告朔饩羊) [Annotations]</a:t>
-            </a:r>
-          </a:p>
-        </p:txBody>
-      </p:sp>
-      <p:sp>
-        <p:nvSpPr>
-          <p:cNvPr id="4" name="Rounded Rectangle 3"/>
-          <p:cNvSpPr/>
-          <p:nvPr/>
-        </p:nvSpPr>
-        <p:spPr>
-          <a:xfrm>
-            <a:off x="457200" y="1371600"/>
-            <a:ext cx="8229600" cy="3840480"/>
-          </a:xfrm>
-          <a:prstGeom prst="roundRect">
-            <a:avLst/>
-          </a:prstGeom>
-          <a:solidFill>
-            <a:srgbClr val="F5F5F0"/>
-          </a:solidFill>
-        </p:spPr>
-        <p:style>
-          <a:lnRef idx="1">
-            <a:schemeClr val="accent1"/>
-          </a:lnRef>
-          <a:fillRef idx="3">
-            <a:schemeClr val="accent1"/>
-          </a:fillRef>
-          <a:effectRef idx="2">
-            <a:schemeClr val="accent1"/>
-          </a:effectRef>
-          <a:fontRef idx="minor">
-            <a:schemeClr val="lt1"/>
-          </a:fontRef>
-        </p:style>
-        <p:txBody>
-          <a:bodyPr rtlCol="0" anchor="ctr" wrap="square"/>
-          <a:lstStyle/>
-          <a:p>
-            <a:pPr algn="ctr">
-              <a:defRPr sz="1800" b="1">
-                <a:solidFill>
-                  <a:srgbClr val="1E3C72"/>
-                </a:solidFill>
-              </a:defRPr>
-            </a:pPr>
-            <a:r>
-              <a:t>[Annotations]</a:t>
-            </a:r>
-          </a:p>
-          <a:p>
-            <a:pPr>
-              <a:spcBef>
-                <a:spcPts val="500"/>
-              </a:spcBef>
-              <a:defRPr sz="1700">
-                <a:solidFill>
-                  <a:srgbClr val="333333"/>
-                </a:solidFill>
-              </a:defRPr>
-            </a:pPr>
-            <a:r>
-              <a:t>* Gao Shuo (告朔): Ancient ritual where lords sacrificed to ancestors on the first day of each month</a:t>
-            </a:r>
-          </a:p>
-          <a:p>
-            <a:pPr>
-              <a:spcBef>
-                <a:spcPts val="500"/>
-              </a:spcBef>
-              <a:defRPr sz="1700">
-                <a:solidFill>
-                  <a:srgbClr val="333333"/>
-                </a:solidFill>
-              </a:defRPr>
-            </a:pPr>
-            <a:r>
-              <a:t>* Xi Yang (饩羊): Live sheep used for sacrifice</a:t>
-            </a:r>
-          </a:p>
-          <a:p>
-            <a:pPr>
-              <a:spcBef>
-                <a:spcPts val="500"/>
-              </a:spcBef>
-              <a:defRPr sz="1700">
-                <a:solidFill>
-                  <a:srgbClr val="333333"/>
-                </a:solidFill>
-              </a:defRPr>
-            </a:pPr>
-            <a:r>
-              <a:t>* Ai (爱): Reluctant, grudge</a:t>
-            </a:r>
-          </a:p>
-        </p:txBody>
-      </p:sp>
-      <p:sp>
-        <p:nvSpPr>
-          <p:cNvPr id="5" name="TextBox 4"/>
-          <p:cNvSpPr txBox="1"/>
-          <p:nvPr/>
-        </p:nvSpPr>
-        <p:spPr>
-          <a:xfrm>
-            <a:off x="8229600" y="6583680"/>
-            <a:ext cx="731520" cy="274320"/>
-          </a:xfrm>
-          <a:prstGeom prst="rect">
-            <a:avLst/>
-          </a:prstGeom>
-          <a:noFill/>
-        </p:spPr>
-        <p:txBody>
-          <a:bodyPr wrap="none">
-            <a:spAutoFit/>
-          </a:bodyPr>
-          <a:lstStyle/>
-          <a:p>
-            <a:pPr algn="r">
-              <a:defRPr sz="1200">
-                <a:solidFill>
-                  <a:srgbClr val="969696"/>
-                </a:solidFill>
-              </a:defRPr>
-            </a:pPr>
-            <a:r>
-              <a:t>9/14</a:t>
             </a:r>
           </a:p>
         </p:txBody>
